--- a/doc/diamond-lightning-node.pptx
+++ b/doc/diamond-lightning-node.pptx
@@ -3257,7 +3257,7 @@
                 </a:solidFill>
                 <a:latin typeface="Arial"/>
               </a:rPr>
-              <a:t>A Lightning node with no API, no keys,</a:t>
+              <a:t>A Lightning node that is not trusted —</a:t>
             </a:r>
           </a:p>
           <a:p>
@@ -3273,7 +3273,7 @@
                 </a:solidFill>
                 <a:latin typeface="Arial"/>
               </a:rPr>
-              <a:t>and no trust placed in itself</a:t>
+              <a:t>not even by itself</a:t>
             </a:r>
           </a:p>
         </p:txBody>
@@ -3524,7 +3524,7 @@
                 </a:solidFill>
                 <a:latin typeface="Arial"/>
               </a:rPr>
-              <a:t>—   Compromise the host and you have the interface and the money</a:t>
+              <a:t>—   Whoever controls the node controls the money</a:t>
             </a:r>
           </a:p>
         </p:txBody>
@@ -3664,21 +3664,45 @@
                 </a:solidFill>
                 <a:latin typeface="Arial"/>
               </a:rPr>
-              <a:t>WHAT WE BUILT INSTEAD</a:t>
-            </a:r>
-          </a:p>
-        </p:txBody>
-      </p:sp>
-      <p:sp>
-        <p:nvSpPr>
-          <p:cNvPr id="4" name="TextBox 3"/>
+              <a:t>THE ARCHITECTURE</a:t>
+            </a:r>
+          </a:p>
+        </p:txBody>
+      </p:sp>
+      <p:pic>
+        <p:nvPicPr>
+          <p:cNvPr id="4" name="Picture 3" descr="design-dark.png"/>
+          <p:cNvPicPr>
+            <a:picLocks noChangeAspect="1"/>
+          </p:cNvPicPr>
+          <p:nvPr/>
+        </p:nvPicPr>
+        <p:blipFill>
+          <a:blip r:embed="rId2"/>
+          <a:stretch>
+            <a:fillRect/>
+          </a:stretch>
+        </p:blipFill>
+        <p:spPr>
+          <a:xfrm>
+            <a:off x="2599829" y="1024128"/>
+            <a:ext cx="6992037" cy="4892040"/>
+          </a:xfrm>
+          <a:prstGeom prst="rect">
+            <a:avLst/>
+          </a:prstGeom>
+        </p:spPr>
+      </p:pic>
+      <p:sp>
+        <p:nvSpPr>
+          <p:cNvPr id="5" name="TextBox 4"/>
           <p:cNvSpPr txBox="1"/>
           <p:nvPr/>
         </p:nvSpPr>
         <p:spPr>
           <a:xfrm>
-            <a:off x="822960" y="1051560"/>
-            <a:ext cx="10515600" cy="1280160"/>
+            <a:off x="822960" y="5989320"/>
+            <a:ext cx="10515600" cy="457200"/>
           </a:xfrm>
           <a:prstGeom prst="rect">
             <a:avLst/>
@@ -3697,171 +3721,13 @@
               </a:spcAft>
             </a:pPr>
             <a:r>
-              <a:rPr sz="4000" b="1" i="0">
-                <a:solidFill>
-                  <a:srgbClr val="E8EDF2"/>
-                </a:solidFill>
-                <a:latin typeface="Arial"/>
-              </a:rPr>
-              <a:t>Three properties, chosen deliberately</a:t>
-            </a:r>
-          </a:p>
-        </p:txBody>
-      </p:sp>
-      <p:sp>
-        <p:nvSpPr>
-          <p:cNvPr id="5" name="TextBox 4"/>
-          <p:cNvSpPr txBox="1"/>
-          <p:nvPr/>
-        </p:nvSpPr>
-        <p:spPr>
-          <a:xfrm>
-            <a:off x="822960" y="2286000"/>
-            <a:ext cx="10515600" cy="3840480"/>
-          </a:xfrm>
-          <a:prstGeom prst="rect">
-            <a:avLst/>
-          </a:prstGeom>
-          <a:noFill/>
-        </p:spPr>
-        <p:txBody>
-          <a:bodyPr wrap="square" lIns="0" rIns="0" tIns="0" bIns="0">
-            <a:spAutoFit/>
-          </a:bodyPr>
-          <a:lstStyle/>
-          <a:p>
-            <a:pPr>
-              <a:spcAft>
-                <a:spcPts val="600"/>
-              </a:spcAft>
-            </a:pPr>
-            <a:r>
-              <a:rPr sz="2000" b="1" i="0">
-                <a:solidFill>
-                  <a:srgbClr val="7FD8E8"/>
-                </a:solidFill>
-                <a:latin typeface="Arial"/>
-              </a:rPr>
-              <a:t>Transparent</a:t>
-            </a:r>
-          </a:p>
-          <a:p>
-            <a:pPr>
-              <a:spcAft>
-                <a:spcPts val="600"/>
-              </a:spcAft>
-            </a:pPr>
-            <a:r>
-              <a:rPr sz="1800" b="0" i="0">
+              <a:rPr sz="1400" b="0" i="1">
                 <a:solidFill>
                   <a:srgbClr val="8A97A3"/>
                 </a:solidFill>
                 <a:latin typeface="Arial"/>
               </a:rPr>
-              <a:t>User-auditable, under GPL-3. Nothing to take on faith.</a:t>
-            </a:r>
-          </a:p>
-          <a:p>
-            <a:pPr>
-              <a:spcAft>
-                <a:spcPts val="600"/>
-              </a:spcAft>
-            </a:pPr>
-            <a:r>
-              <a:rPr sz="2000" b="1" i="0">
-                <a:solidFill>
-                  <a:srgbClr val="7FD8E8"/>
-                </a:solidFill>
-                <a:latin typeface="Arial"/>
-              </a:rPr>
-              <a:t>Hard</a:t>
-            </a:r>
-          </a:p>
-          <a:p>
-            <a:pPr>
-              <a:spcAft>
-                <a:spcPts val="600"/>
-              </a:spcAft>
-            </a:pPr>
-            <a:r>
-              <a:rPr sz="1800" b="0" i="0">
-                <a:solidFill>
-                  <a:srgbClr val="8A97A3"/>
-                </a:solidFill>
-                <a:latin typeface="Arial"/>
-              </a:rPr>
-              <a:t>Low attack surface, minimal, defensive, functional design.</a:t>
-            </a:r>
-          </a:p>
-          <a:p>
-            <a:pPr>
-              <a:spcAft>
-                <a:spcPts val="600"/>
-              </a:spcAft>
-            </a:pPr>
-            <a:r>
-              <a:rPr sz="2000" b="1" i="0">
-                <a:solidFill>
-                  <a:srgbClr val="7FD8E8"/>
-                </a:solidFill>
-                <a:latin typeface="Arial"/>
-              </a:rPr>
-              <a:t>Controlled</a:t>
-            </a:r>
-          </a:p>
-          <a:p>
-            <a:pPr>
-              <a:spcAft>
-                <a:spcPts val="600"/>
-              </a:spcAft>
-            </a:pPr>
-            <a:r>
-              <a:rPr sz="1800" b="0" i="0">
-                <a:solidFill>
-                  <a:srgbClr val="8A97A3"/>
-                </a:solidFill>
-                <a:latin typeface="Arial"/>
-              </a:rPr>
-              <a:t>A process from commit to review to deployment.</a:t>
-            </a:r>
-          </a:p>
-        </p:txBody>
-      </p:sp>
-      <p:sp>
-        <p:nvSpPr>
-          <p:cNvPr id="6" name="TextBox 5"/>
-          <p:cNvSpPr txBox="1"/>
-          <p:nvPr/>
-        </p:nvSpPr>
-        <p:spPr>
-          <a:xfrm>
-            <a:off x="822960" y="5989320"/>
-            <a:ext cx="10515600" cy="457200"/>
-          </a:xfrm>
-          <a:prstGeom prst="rect">
-            <a:avLst/>
-          </a:prstGeom>
-          <a:noFill/>
-        </p:spPr>
-        <p:txBody>
-          <a:bodyPr wrap="square" lIns="0" rIns="0" tIns="0" bIns="0">
-            <a:spAutoFit/>
-          </a:bodyPr>
-          <a:lstStyle/>
-          <a:p>
-            <a:pPr>
-              <a:spcAft>
-                <a:spcPts val="0"/>
-              </a:spcAft>
-            </a:pPr>
-            <a:r>
-              <a:rPr sz="1400" b="0" i="1">
-                <a:solidFill>
-                  <a:srgbClr val="8A97A3"/>
-                </a:solidFill>
-                <a:latin typeface="Arial"/>
-              </a:rPr>
-              <a:t>Like a diamond: transparent, hard, and made under controlled conditions.</a:t>
+              <a:t>Three roles, three protocols, and a signer the node cannot talk past.</a:t>
             </a:r>
           </a:p>
         </p:txBody>
@@ -3962,7 +3828,7 @@
                 </a:solidFill>
                 <a:latin typeface="Arial"/>
               </a:rPr>
-              <a:t>NO API</a:t>
+              <a:t>SEPARATION OF POWERS</a:t>
             </a:r>
           </a:p>
         </p:txBody>
@@ -4001,7 +3867,7 @@
                 </a:solidFill>
                 <a:latin typeface="Arial"/>
               </a:rPr>
-              <a:t>Nostr is the only control plane</a:t>
+              <a:t>Three roles, and none of them is trusted twice</a:t>
             </a:r>
           </a:p>
         </p:txBody>
@@ -4014,7 +3880,7 @@
         </p:nvSpPr>
         <p:spPr>
           <a:xfrm>
-            <a:off x="822960" y="2331720"/>
+            <a:off x="822960" y="2286000"/>
             <a:ext cx="10515600" cy="3840480"/>
           </a:xfrm>
           <a:prstGeom prst="rect">
@@ -4030,23 +3896,23 @@
           <a:p>
             <a:pPr>
               <a:spcAft>
-                <a:spcPts val="1000"/>
-              </a:spcAft>
-            </a:pPr>
-            <a:r>
-              <a:rPr sz="2000" b="0" i="0">
-                <a:solidFill>
-                  <a:srgbClr val="E8EDF2"/>
-                </a:solidFill>
-                <a:latin typeface="Arial"/>
-              </a:rPr>
-              <a:t>There is no CLI. There is no local socket. Nothing listens for control.</a:t>
-            </a:r>
-          </a:p>
-          <a:p>
-            <a:pPr>
-              <a:spcAft>
-                <a:spcPts val="1000"/>
+                <a:spcPts val="600"/>
+              </a:spcAft>
+            </a:pPr>
+            <a:r>
+              <a:rPr sz="2000" b="1" i="0">
+                <a:solidFill>
+                  <a:srgbClr val="7FD8E8"/>
+                </a:solidFill>
+                <a:latin typeface="Arial"/>
+              </a:rPr>
+              <a:t>Owner</a:t>
+            </a:r>
+          </a:p>
+          <a:p>
+            <a:pPr>
+              <a:spcAft>
+                <a:spcPts val="600"/>
               </a:spcAft>
             </a:pPr>
             <a:r>
@@ -4056,45 +3922,29 @@
                 </a:solidFill>
                 <a:latin typeface="Arial"/>
               </a:rPr>
-              <a:t/>
-            </a:r>
-          </a:p>
-          <a:p>
-            <a:pPr>
-              <a:spcAft>
-                <a:spcPts val="1000"/>
-              </a:spcAft>
-            </a:pPr>
-            <a:r>
-              <a:rPr sz="2000" b="0" i="0">
-                <a:solidFill>
-                  <a:srgbClr val="E8EDF2"/>
-                </a:solidFill>
-                <a:latin typeface="Arial"/>
-              </a:rPr>
-              <a:t>—   NWC — wallet operations: balances, invoices, payments, on-chain</a:t>
-            </a:r>
-          </a:p>
-          <a:p>
-            <a:pPr>
-              <a:spcAft>
-                <a:spcPts val="1000"/>
-              </a:spcAft>
-            </a:pPr>
-            <a:r>
-              <a:rPr sz="2000" b="0" i="0">
-                <a:solidFill>
-                  <a:srgbClr val="E8EDF2"/>
-                </a:solidFill>
-                <a:latin typeface="Arial"/>
-              </a:rPr>
-              <a:t>—   NCC — node operations: channels, peers, fees, routing</a:t>
-            </a:r>
-          </a:p>
-          <a:p>
-            <a:pPr>
-              <a:spcAft>
-                <a:spcPts val="1000"/>
+              <a:t>Defines the signing policy. Touches nothing day to day.</a:t>
+            </a:r>
+          </a:p>
+          <a:p>
+            <a:pPr>
+              <a:spcAft>
+                <a:spcPts val="600"/>
+              </a:spcAft>
+            </a:pPr>
+            <a:r>
+              <a:rPr sz="2000" b="1" i="0">
+                <a:solidFill>
+                  <a:srgbClr val="7FD8E8"/>
+                </a:solidFill>
+                <a:latin typeface="Arial"/>
+              </a:rPr>
+              <a:t>User</a:t>
+            </a:r>
+          </a:p>
+          <a:p>
+            <a:pPr>
+              <a:spcAft>
+                <a:spcPts val="600"/>
               </a:spcAft>
             </a:pPr>
             <a:r>
@@ -4104,13 +3954,13 @@
                 </a:solidFill>
                 <a:latin typeface="Arial"/>
               </a:rPr>
-              <a:t/>
-            </a:r>
-          </a:p>
-          <a:p>
-            <a:pPr>
-              <a:spcAft>
-                <a:spcPts val="1000"/>
+              <a:t>Spends through the wallet, within the Owner's permissions and limits.</a:t>
+            </a:r>
+          </a:p>
+          <a:p>
+            <a:pPr>
+              <a:spcAft>
+                <a:spcPts val="600"/>
               </a:spcAft>
             </a:pPr>
             <a:r>
@@ -4120,7 +3970,23 @@
                 </a:solidFill>
                 <a:latin typeface="Arial"/>
               </a:rPr>
-              <a:t>The node reaches out to a relay. It is never reached.</a:t>
+              <a:t>Controller</a:t>
+            </a:r>
+          </a:p>
+          <a:p>
+            <a:pPr>
+              <a:spcAft>
+                <a:spcPts val="600"/>
+              </a:spcAft>
+            </a:pPr>
+            <a:r>
+              <a:rPr sz="1800" b="0" i="0">
+                <a:solidFill>
+                  <a:srgbClr val="8A97A3"/>
+                </a:solidFill>
+                <a:latin typeface="Arial"/>
+              </a:rPr>
+              <a:t>Operates the node — channels, peers, fees — under the same policy.</a:t>
             </a:r>
           </a:p>
         </p:txBody>
@@ -4159,7 +4025,7 @@
                 </a:solidFill>
                 <a:latin typeface="Arial"/>
               </a:rPr>
-              <a:t>Nothing to port-scan. Nothing to leave accidentally exposed.</a:t>
+              <a:t>A role is a key, not an account. Capabilities are granted per key and per method.</a:t>
             </a:r>
           </a:p>
         </p:txBody>
@@ -4260,7 +4126,7 @@
                 </a:solidFill>
                 <a:latin typeface="Arial"/>
               </a:rPr>
-              <a:t>CUSTODY</a:t>
+              <a:t>ONE TRANSPORT, THREE PROTOCOLS</a:t>
             </a:r>
           </a:p>
         </p:txBody>
@@ -4299,7 +4165,7 @@
                 </a:solidFill>
                 <a:latin typeface="Arial"/>
               </a:rPr>
-              <a:t>The node does not hold the keys</a:t>
+              <a:t>Nostr is the only control plane</a:t>
             </a:r>
           </a:p>
         </p:txBody>
@@ -4312,7 +4178,7 @@
         </p:nvSpPr>
         <p:spPr>
           <a:xfrm>
-            <a:off x="822960" y="2331720"/>
+            <a:off x="822960" y="2240280"/>
             <a:ext cx="10515600" cy="3840480"/>
           </a:xfrm>
           <a:prstGeom prst="rect">
@@ -4328,71 +4194,23 @@
           <a:p>
             <a:pPr>
               <a:spcAft>
-                <a:spcPts val="1200"/>
-              </a:spcAft>
-            </a:pPr>
-            <a:r>
-              <a:rPr sz="2000" b="0" i="0">
-                <a:solidFill>
-                  <a:srgbClr val="E8EDF2"/>
-                </a:solidFill>
-                <a:latin typeface="Arial"/>
-              </a:rPr>
-              <a:t>—   Keys live in a separate signing process, reached over a relay</a:t>
-            </a:r>
-          </a:p>
-          <a:p>
-            <a:pPr>
-              <a:spcAft>
-                <a:spcPts val="1200"/>
-              </a:spcAft>
-            </a:pPr>
-            <a:r>
-              <a:rPr sz="2000" b="0" i="0">
-                <a:solidFill>
-                  <a:srgbClr val="E8EDF2"/>
-                </a:solidFill>
-                <a:latin typeface="Arial"/>
-              </a:rPr>
-              <a:t>—   Every signature is a request the signer validates against policy</a:t>
-            </a:r>
-          </a:p>
-          <a:p>
-            <a:pPr>
-              <a:spcAft>
-                <a:spcPts val="1200"/>
-              </a:spcAft>
-            </a:pPr>
-            <a:r>
-              <a:rPr sz="2000" b="0" i="0">
-                <a:solidFill>
-                  <a:srgbClr val="E8EDF2"/>
-                </a:solidFill>
-                <a:latin typeface="Arial"/>
-              </a:rPr>
-              <a:t>—   The signer can refuse — and the node cannot override it</a:t>
-            </a:r>
-          </a:p>
-          <a:p>
-            <a:pPr>
-              <a:spcAft>
-                <a:spcPts val="1200"/>
-              </a:spcAft>
-            </a:pPr>
-            <a:r>
-              <a:rPr sz="2000" b="0" i="0">
-                <a:solidFill>
-                  <a:srgbClr val="E8EDF2"/>
-                </a:solidFill>
-                <a:latin typeface="Arial"/>
-              </a:rPr>
-              <a:t>—   The signer can run inside an attested secure enclave</a:t>
-            </a:r>
-          </a:p>
-          <a:p>
-            <a:pPr>
-              <a:spcAft>
-                <a:spcPts val="1200"/>
+                <a:spcPts val="600"/>
+              </a:spcAft>
+            </a:pPr>
+            <a:r>
+              <a:rPr sz="2000" b="1" i="0">
+                <a:solidFill>
+                  <a:srgbClr val="7FD8E8"/>
+                </a:solidFill>
+                <a:latin typeface="Arial"/>
+              </a:rPr>
+              <a:t>NWC   ·   the wallet</a:t>
+            </a:r>
+          </a:p>
+          <a:p>
+            <a:pPr>
+              <a:spcAft>
+                <a:spcPts val="600"/>
               </a:spcAft>
             </a:pPr>
             <a:r>
@@ -4402,13 +4220,13 @@
                 </a:solidFill>
                 <a:latin typeface="Arial"/>
               </a:rPr>
-              <a:t/>
-            </a:r>
-          </a:p>
-          <a:p>
-            <a:pPr>
-              <a:spcAft>
-                <a:spcPts val="1200"/>
+              <a:t>Invoices, payments, offers, on-chain. Extends NIP-47.</a:t>
+            </a:r>
+          </a:p>
+          <a:p>
+            <a:pPr>
+              <a:spcAft>
+                <a:spcPts val="600"/>
               </a:spcAft>
             </a:pPr>
             <a:r>
@@ -4418,7 +4236,94 @@
                 </a:solidFill>
                 <a:latin typeface="Arial"/>
               </a:rPr>
-              <a:t>Compromising the node does not get you the money.</a:t>
+              <a:t>NCC   ·   the node</a:t>
+            </a:r>
+          </a:p>
+          <a:p>
+            <a:pPr>
+              <a:spcAft>
+                <a:spcPts val="600"/>
+              </a:spcAft>
+            </a:pPr>
+            <a:r>
+              <a:rPr sz="1800" b="0" i="0">
+                <a:solidFill>
+                  <a:srgbClr val="8A97A3"/>
+                </a:solidFill>
+                <a:latin typeface="Arial"/>
+              </a:rPr>
+              <a:t>Channels, peers, fees, routing, network queries.</a:t>
+            </a:r>
+          </a:p>
+          <a:p>
+            <a:pPr>
+              <a:spcAft>
+                <a:spcPts val="600"/>
+              </a:spcAft>
+            </a:pPr>
+            <a:r>
+              <a:rPr sz="2000" b="1" i="0">
+                <a:solidFill>
+                  <a:srgbClr val="7FD8E8"/>
+                </a:solidFill>
+                <a:latin typeface="Arial"/>
+              </a:rPr>
+              <a:t>NSC   ·   the signer</a:t>
+            </a:r>
+          </a:p>
+          <a:p>
+            <a:pPr>
+              <a:spcAft>
+                <a:spcPts val="600"/>
+              </a:spcAft>
+            </a:pPr>
+            <a:r>
+              <a:rPr sz="1800" b="0" i="0">
+                <a:solidFill>
+                  <a:srgbClr val="8A97A3"/>
+                </a:solidFill>
+                <a:latin typeface="Arial"/>
+              </a:rPr>
+              <a:t>Signing requests, and the policy that governs them.</a:t>
+            </a:r>
+          </a:p>
+        </p:txBody>
+      </p:sp>
+      <p:sp>
+        <p:nvSpPr>
+          <p:cNvPr id="6" name="TextBox 5"/>
+          <p:cNvSpPr txBox="1"/>
+          <p:nvPr/>
+        </p:nvSpPr>
+        <p:spPr>
+          <a:xfrm>
+            <a:off x="822960" y="5989320"/>
+            <a:ext cx="10515600" cy="457200"/>
+          </a:xfrm>
+          <a:prstGeom prst="rect">
+            <a:avLst/>
+          </a:prstGeom>
+          <a:noFill/>
+        </p:spPr>
+        <p:txBody>
+          <a:bodyPr wrap="square" lIns="0" rIns="0" tIns="0" bIns="0">
+            <a:spAutoFit/>
+          </a:bodyPr>
+          <a:lstStyle/>
+          <a:p>
+            <a:pPr>
+              <a:spcAft>
+                <a:spcPts val="0"/>
+              </a:spcAft>
+            </a:pPr>
+            <a:r>
+              <a:rPr sz="1400" b="0" i="1">
+                <a:solidFill>
+                  <a:srgbClr val="8A97A3"/>
+                </a:solidFill>
+                <a:latin typeface="Arial"/>
+              </a:rPr>
+              <a:t>No CLI. No local socket. Nothing listens for control — the node reaches out to a relay.</a:t>
             </a:r>
           </a:p>
         </p:txBody>
@@ -4519,7 +4424,7 @@
                 </a:solidFill>
                 <a:latin typeface="Arial"/>
               </a:rPr>
-              <a:t>AUTHORISATION</a:t>
+              <a:t>WHY THE SHAPE MATTERS</a:t>
             </a:r>
           </a:p>
         </p:txBody>
@@ -4552,13 +4457,14 @@
               </a:spcAft>
             </a:pPr>
             <a:r>
-              <a:rPr sz="4000" b="1" i="0">
+              <a:rPr sz="3800" b="1" i="0">
                 <a:solidFill>
                   <a:srgbClr val="E8EDF2"/>
                 </a:solidFill>
                 <a:latin typeface="Arial"/>
               </a:rPr>
-              <a:t>A capability, not a password</a:t>
+              <a:t>Policy lives in the signer,
+not in the node</a:t>
             </a:r>
           </a:p>
         </p:txBody>
@@ -4571,7 +4477,7 @@
         </p:nvSpPr>
         <p:spPr>
           <a:xfrm>
-            <a:off x="822960" y="2286000"/>
+            <a:off x="822960" y="2834640"/>
             <a:ext cx="10515600" cy="3840480"/>
           </a:xfrm>
           <a:prstGeom prst="rect">
@@ -4597,7 +4503,7 @@
                 </a:solidFill>
                 <a:latin typeface="Arial"/>
               </a:rPr>
-              <a:t>Access is granted per method and per client key, as a signed</a:t>
+              <a:t>The keys are not the node's. Every signature is a request the signer</a:t>
             </a:r>
           </a:p>
           <a:p>
@@ -4613,7 +4519,7 @@
                 </a:solidFill>
                 <a:latin typeface="Arial"/>
               </a:rPr>
-              <a:t>Nostr event the node reads from the relay.</a:t>
+              <a:t>validates against the Owner's policy — and can refuse.</a:t>
             </a:r>
           </a:p>
           <a:p>
@@ -4639,77 +4545,61 @@
               </a:spcAft>
             </a:pPr>
             <a:r>
+              <a:rPr sz="2000" b="1" i="0">
+                <a:solidFill>
+                  <a:srgbClr val="7FD8E8"/>
+                </a:solidFill>
+                <a:latin typeface="Arial"/>
+              </a:rPr>
+              <a:t>A user or controller cannot make the signer approve an operation</a:t>
+            </a:r>
+          </a:p>
+          <a:p>
+            <a:pPr>
+              <a:spcAft>
+                <a:spcPts val="800"/>
+              </a:spcAft>
+            </a:pPr>
+            <a:r>
+              <a:rPr sz="2000" b="1" i="0">
+                <a:solidFill>
+                  <a:srgbClr val="7FD8E8"/>
+                </a:solidFill>
+                <a:latin typeface="Arial"/>
+              </a:rPr>
+              <a:t>outside that policy merely by controlling dln-node.</a:t>
+            </a:r>
+          </a:p>
+          <a:p>
+            <a:pPr>
+              <a:spcAft>
+                <a:spcPts val="800"/>
+              </a:spcAft>
+            </a:pPr>
+            <a:r>
+              <a:rPr sz="1800" b="0" i="0">
+                <a:solidFill>
+                  <a:srgbClr val="8A97A3"/>
+                </a:solidFill>
+                <a:latin typeface="Arial"/>
+              </a:rPr>
+              <a:t/>
+            </a:r>
+          </a:p>
+          <a:p>
+            <a:pPr>
+              <a:spcAft>
+                <a:spcPts val="800"/>
+              </a:spcAft>
+            </a:pPr>
+            <a:r>
               <a:rPr sz="2000" b="0" i="0">
                 <a:solidFill>
                   <a:srgbClr val="E8EDF2"/>
                 </a:solidFill>
                 <a:latin typeface="Arial"/>
               </a:rPr>
-              <a:t>—   Different clients hold different powers over the same node</a:t>
-            </a:r>
-          </a:p>
-          <a:p>
-            <a:pPr>
-              <a:spcAft>
-                <a:spcPts val="800"/>
-              </a:spcAft>
-            </a:pPr>
-            <a:r>
-              <a:rPr sz="2000" b="0" i="0">
-                <a:solidFill>
-                  <a:srgbClr val="E8EDF2"/>
-                </a:solidFill>
-                <a:latin typeface="Arial"/>
-              </a:rPr>
-              <a:t>—   Rate limits per method, quotas per client</a:t>
-            </a:r>
-          </a:p>
-          <a:p>
-            <a:pPr>
-              <a:spcAft>
-                <a:spcPts val="800"/>
-              </a:spcAft>
-            </a:pPr>
-            <a:r>
-              <a:rPr sz="2000" b="0" i="0">
-                <a:solidFill>
-                  <a:srgbClr val="E8EDF2"/>
-                </a:solidFill>
-                <a:latin typeface="Arial"/>
-              </a:rPr>
-              <a:t>—   A method absent from the grant is simply refused</a:t>
-            </a:r>
-          </a:p>
-          <a:p>
-            <a:pPr>
-              <a:spcAft>
-                <a:spcPts val="800"/>
-              </a:spcAft>
-            </a:pPr>
-            <a:r>
-              <a:rPr sz="1800" b="0" i="0">
-                <a:solidFill>
-                  <a:srgbClr val="8A97A3"/>
-                </a:solidFill>
-                <a:latin typeface="Arial"/>
-              </a:rPr>
-              <a:t/>
-            </a:r>
-          </a:p>
-          <a:p>
-            <a:pPr>
-              <a:spcAft>
-                <a:spcPts val="800"/>
-              </a:spcAft>
-            </a:pPr>
-            <a:r>
-              <a:rPr sz="2000" b="1" i="0">
-                <a:solidFill>
-                  <a:srgbClr val="7FD8E8"/>
-                </a:solidFill>
-                <a:latin typeface="Arial"/>
-              </a:rPr>
-              <a:t>No bearer tokens to steal. No macaroon to copy.</a:t>
+              <a:t>—   The signer can run inside an attested secure enclave.</a:t>
             </a:r>
           </a:p>
         </p:txBody>

--- a/doc/diamond-lightning-node.pptx
+++ b/doc/diamond-lightning-node.pptx
@@ -14,6 +14,7 @@
     <p:sldId id="262" r:id="rId13"/>
     <p:sldId id="263" r:id="rId14"/>
     <p:sldId id="264" r:id="rId15"/>
+    <p:sldId id="265" r:id="rId16"/>
   </p:sldIdLst>
   <p:sldSz cx="12191695" cy="6858000" type="screen4x3"/>
   <p:notesSz cx="6858000" cy="9144000"/>
@@ -3325,6 +3326,289 @@
 </p:sld>
 </file>
 
+<file path=ppt/slides/slide10.xml><?xml version="1.0" encoding="utf-8"?>
+<p:sld xmlns:a="http://schemas.openxmlformats.org/drawingml/2006/main" xmlns:p="http://schemas.openxmlformats.org/presentationml/2006/main" xmlns:r="http://schemas.openxmlformats.org/officeDocument/2006/relationships">
+  <p:cSld>
+    <p:spTree>
+      <p:nvGrpSpPr>
+        <p:cNvPr id="1" name=""/>
+        <p:cNvGrpSpPr/>
+        <p:nvPr/>
+      </p:nvGrpSpPr>
+      <p:grpSpPr/>
+      <p:sp>
+        <p:nvSpPr>
+          <p:cNvPr id="2" name="Rectangle 1"/>
+          <p:cNvSpPr/>
+          <p:nvPr/>
+        </p:nvSpPr>
+        <p:spPr>
+          <a:xfrm>
+            <a:off x="0" y="0"/>
+            <a:ext cx="12191695" cy="6858000"/>
+          </a:xfrm>
+          <a:prstGeom prst="rect">
+            <a:avLst/>
+          </a:prstGeom>
+          <a:solidFill>
+            <a:srgbClr val="0B0F14"/>
+          </a:solidFill>
+          <a:ln>
+            <a:noFill/>
+          </a:ln>
+          <a:effectLst/>
+        </p:spPr>
+        <p:style>
+          <a:lnRef idx="1">
+            <a:schemeClr val="accent1"/>
+          </a:lnRef>
+          <a:fillRef idx="3">
+            <a:schemeClr val="accent1"/>
+          </a:fillRef>
+          <a:effectRef idx="2">
+            <a:schemeClr val="accent1"/>
+          </a:effectRef>
+          <a:fontRef idx="minor">
+            <a:schemeClr val="lt1"/>
+          </a:fontRef>
+        </p:style>
+        <p:txBody>
+          <a:bodyPr rtlCol="0" anchor="ctr"/>
+          <a:lstStyle/>
+          <a:p>
+            <a:pPr algn="ctr"/>
+          </a:p>
+        </p:txBody>
+      </p:sp>
+      <p:sp>
+        <p:nvSpPr>
+          <p:cNvPr id="3" name="TextBox 2"/>
+          <p:cNvSpPr txBox="1"/>
+          <p:nvPr/>
+        </p:nvSpPr>
+        <p:spPr>
+          <a:xfrm>
+            <a:off x="822960" y="566928"/>
+            <a:ext cx="10058400" cy="365760"/>
+          </a:xfrm>
+          <a:prstGeom prst="rect">
+            <a:avLst/>
+          </a:prstGeom>
+          <a:noFill/>
+        </p:spPr>
+        <p:txBody>
+          <a:bodyPr wrap="square" lIns="0" rIns="0" tIns="0" bIns="0">
+            <a:spAutoFit/>
+          </a:bodyPr>
+          <a:lstStyle/>
+          <a:p>
+            <a:pPr>
+              <a:spcAft>
+                <a:spcPts val="0"/>
+              </a:spcAft>
+            </a:pPr>
+            <a:r>
+              <a:rPr sz="1200" b="1" i="0">
+                <a:solidFill>
+                  <a:srgbClr val="7FD8E8"/>
+                </a:solidFill>
+                <a:latin typeface="Arial"/>
+              </a:rPr>
+              <a:t>WHERE IT STANDS</a:t>
+            </a:r>
+          </a:p>
+        </p:txBody>
+      </p:sp>
+      <p:sp>
+        <p:nvSpPr>
+          <p:cNvPr id="4" name="TextBox 3"/>
+          <p:cNvSpPr txBox="1"/>
+          <p:nvPr/>
+        </p:nvSpPr>
+        <p:spPr>
+          <a:xfrm>
+            <a:off x="822960" y="1051560"/>
+            <a:ext cx="10515600" cy="1280160"/>
+          </a:xfrm>
+          <a:prstGeom prst="rect">
+            <a:avLst/>
+          </a:prstGeom>
+          <a:noFill/>
+        </p:spPr>
+        <p:txBody>
+          <a:bodyPr wrap="square" lIns="0" rIns="0" tIns="0" bIns="0">
+            <a:spAutoFit/>
+          </a:bodyPr>
+          <a:lstStyle/>
+          <a:p>
+            <a:pPr>
+              <a:spcAft>
+                <a:spcPts val="0"/>
+              </a:spcAft>
+            </a:pPr>
+            <a:r>
+              <a:rPr sz="3800" b="1" i="0">
+                <a:solidFill>
+                  <a:srgbClr val="E8EDF2"/>
+                </a:solidFill>
+                <a:latin typeface="Arial"/>
+              </a:rPr>
+              <a:t>Fast is demonstrated.
+Safe is not yet.</a:t>
+            </a:r>
+          </a:p>
+        </p:txBody>
+      </p:sp>
+      <p:sp>
+        <p:nvSpPr>
+          <p:cNvPr id="5" name="TextBox 4"/>
+          <p:cNvSpPr txBox="1"/>
+          <p:nvPr/>
+        </p:nvSpPr>
+        <p:spPr>
+          <a:xfrm>
+            <a:off x="822960" y="3017520"/>
+            <a:ext cx="10515600" cy="3840480"/>
+          </a:xfrm>
+          <a:prstGeom prst="rect">
+            <a:avLst/>
+          </a:prstGeom>
+          <a:noFill/>
+        </p:spPr>
+        <p:txBody>
+          <a:bodyPr wrap="square" lIns="0" rIns="0" tIns="0" bIns="0">
+            <a:spAutoFit/>
+          </a:bodyPr>
+          <a:lstStyle/>
+          <a:p>
+            <a:pPr>
+              <a:spcAft>
+                <a:spcPts val="1200"/>
+              </a:spcAft>
+            </a:pPr>
+            <a:r>
+              <a:rPr sz="2000" b="0" i="0">
+                <a:solidFill>
+                  <a:srgbClr val="E8EDF2"/>
+                </a:solidFill>
+                <a:latin typeface="Arial"/>
+              </a:rPr>
+              <a:t>—   Proven — the happy path, end to end, on both chains, across the fork</a:t>
+            </a:r>
+          </a:p>
+          <a:p>
+            <a:pPr>
+              <a:spcAft>
+                <a:spcPts val="1200"/>
+              </a:spcAft>
+            </a:pPr>
+            <a:r>
+              <a:rPr sz="2000" b="0" i="0">
+                <a:solidFill>
+                  <a:srgbClr val="E8EDF2"/>
+                </a:solidFill>
+                <a:latin typeface="Arial"/>
+              </a:rPr>
+              <a:t>—   Not proven — force closes, HTLC timeouts, on-chain claims</a:t>
+            </a:r>
+          </a:p>
+          <a:p>
+            <a:pPr>
+              <a:spcAft>
+                <a:spcPts val="1200"/>
+              </a:spcAft>
+            </a:pPr>
+            <a:r>
+              <a:rPr sz="1800" b="0" i="0">
+                <a:solidFill>
+                  <a:srgbClr val="8A97A3"/>
+                </a:solidFill>
+                <a:latin typeface="Arial"/>
+              </a:rPr>
+              <a:t/>
+            </a:r>
+          </a:p>
+          <a:p>
+            <a:pPr>
+              <a:spcAft>
+                <a:spcPts val="1200"/>
+              </a:spcAft>
+            </a:pPr>
+            <a:r>
+              <a:rPr sz="2000" b="0" i="0">
+                <a:solidFill>
+                  <a:srgbClr val="E8EDF2"/>
+                </a:solidFill>
+                <a:latin typeface="Arial"/>
+              </a:rPr>
+              <a:t>Every scenario so far ends with both parties cooperating. The safety</a:t>
+            </a:r>
+          </a:p>
+          <a:p>
+            <a:pPr>
+              <a:spcAft>
+                <a:spcPts val="1200"/>
+              </a:spcAft>
+            </a:pPr>
+            <a:r>
+              <a:rPr sz="2000" b="0" i="0">
+                <a:solidFill>
+                  <a:srgbClr val="E8EDF2"/>
+                </a:solidFill>
+                <a:latin typeface="Arial"/>
+              </a:rPr>
+              <a:t>argument rests entirely on what happens when one of them does not.</a:t>
+            </a:r>
+          </a:p>
+        </p:txBody>
+      </p:sp>
+      <p:sp>
+        <p:nvSpPr>
+          <p:cNvPr id="6" name="TextBox 5"/>
+          <p:cNvSpPr txBox="1"/>
+          <p:nvPr/>
+        </p:nvSpPr>
+        <p:spPr>
+          <a:xfrm>
+            <a:off x="822960" y="5989320"/>
+            <a:ext cx="10515600" cy="457200"/>
+          </a:xfrm>
+          <a:prstGeom prst="rect">
+            <a:avLst/>
+          </a:prstGeom>
+          <a:noFill/>
+        </p:spPr>
+        <p:txBody>
+          <a:bodyPr wrap="square" lIns="0" rIns="0" tIns="0" bIns="0">
+            <a:spAutoFit/>
+          </a:bodyPr>
+          <a:lstStyle/>
+          <a:p>
+            <a:pPr>
+              <a:spcAft>
+                <a:spcPts val="0"/>
+              </a:spcAft>
+            </a:pPr>
+            <a:r>
+              <a:rPr sz="1400" b="0" i="1">
+                <a:solidFill>
+                  <a:srgbClr val="8A97A3"/>
+                </a:solidFill>
+                <a:latin typeface="Arial"/>
+              </a:rPr>
+              <a:t>That is the next mission, and it is deliberately not claimed yet.</a:t>
+            </a:r>
+          </a:p>
+        </p:txBody>
+      </p:sp>
+    </p:spTree>
+  </p:cSld>
+  <p:clrMapOvr>
+    <a:masterClrMapping/>
+  </p:clrMapOvr>
+</p:sld>
+</file>
+
 <file path=ppt/slides/slide2.xml><?xml version="1.0" encoding="utf-8"?>
 <p:sld xmlns:a="http://schemas.openxmlformats.org/drawingml/2006/main" xmlns:p="http://schemas.openxmlformats.org/presentationml/2006/main" xmlns:r="http://schemas.openxmlformats.org/officeDocument/2006/relationships">
   <p:cSld>
@@ -3664,45 +3948,21 @@
                 </a:solidFill>
                 <a:latin typeface="Arial"/>
               </a:rPr>
-              <a:t>THE ARCHITECTURE</a:t>
-            </a:r>
-          </a:p>
-        </p:txBody>
-      </p:sp>
-      <p:pic>
-        <p:nvPicPr>
-          <p:cNvPr id="4" name="Picture 3" descr="design-dark.png"/>
-          <p:cNvPicPr>
-            <a:picLocks noChangeAspect="1"/>
-          </p:cNvPicPr>
-          <p:nvPr/>
-        </p:nvPicPr>
-        <p:blipFill>
-          <a:blip r:embed="rId2"/>
-          <a:stretch>
-            <a:fillRect/>
-          </a:stretch>
-        </p:blipFill>
-        <p:spPr>
-          <a:xfrm>
-            <a:off x="2599829" y="1024128"/>
-            <a:ext cx="6992037" cy="4892040"/>
-          </a:xfrm>
-          <a:prstGeom prst="rect">
-            <a:avLst/>
-          </a:prstGeom>
-        </p:spPr>
-      </p:pic>
-      <p:sp>
-        <p:nvSpPr>
-          <p:cNvPr id="5" name="TextBox 4"/>
+              <a:t>AUGUST 2026</a:t>
+            </a:r>
+          </a:p>
+        </p:txBody>
+      </p:sp>
+      <p:sp>
+        <p:nvSpPr>
+          <p:cNvPr id="4" name="TextBox 3"/>
           <p:cNvSpPr txBox="1"/>
           <p:nvPr/>
         </p:nvSpPr>
         <p:spPr>
           <a:xfrm>
-            <a:off x="822960" y="5989320"/>
-            <a:ext cx="10515600" cy="457200"/>
+            <a:off x="822960" y="1051560"/>
+            <a:ext cx="10515600" cy="1280160"/>
           </a:xfrm>
           <a:prstGeom prst="rect">
             <a:avLst/>
@@ -3721,13 +3981,251 @@
               </a:spcAft>
             </a:pPr>
             <a:r>
+              <a:rPr sz="3400" b="1" i="0">
+                <a:solidFill>
+                  <a:srgbClr val="E8EDF2"/>
+                </a:solidFill>
+                <a:latin typeface="Arial"/>
+              </a:rPr>
+              <a:t>A summer of operators afraid of their own nodes</a:t>
+            </a:r>
+          </a:p>
+        </p:txBody>
+      </p:sp>
+      <p:sp>
+        <p:nvSpPr>
+          <p:cNvPr id="5" name="TextBox 4"/>
+          <p:cNvSpPr txBox="1"/>
+          <p:nvPr/>
+        </p:nvSpPr>
+        <p:spPr>
+          <a:xfrm>
+            <a:off x="822960" y="2148840"/>
+            <a:ext cx="10515600" cy="3840480"/>
+          </a:xfrm>
+          <a:prstGeom prst="rect">
+            <a:avLst/>
+          </a:prstGeom>
+          <a:noFill/>
+        </p:spPr>
+        <p:txBody>
+          <a:bodyPr wrap="square" lIns="0" rIns="0" tIns="0" bIns="0">
+            <a:spAutoFit/>
+          </a:bodyPr>
+          <a:lstStyle/>
+          <a:p>
+            <a:pPr>
+              <a:spcAft>
+                <a:spcPts val="500"/>
+              </a:spcAft>
+            </a:pPr>
+            <a:r>
+              <a:rPr sz="1900" b="1" i="0">
+                <a:solidFill>
+                  <a:srgbClr val="7FD8E8"/>
+                </a:solidFill>
+                <a:latin typeface="Arial"/>
+              </a:rPr>
+              <a:t>BTCPay Server  ·  funds actually taken</a:t>
+            </a:r>
+          </a:p>
+          <a:p>
+            <a:pPr>
+              <a:spcAft>
+                <a:spcPts val="500"/>
+              </a:spcAft>
+            </a:pPr>
+            <a:r>
+              <a:rPr sz="1700" b="0" i="0">
+                <a:solidFill>
+                  <a:srgbClr val="8A97A3"/>
+                </a:solidFill>
+                <a:latin typeface="Arial"/>
+              </a:rPr>
+              <a:t>An unauthenticated request could read LND's .macaroon files. Actively</a:t>
+            </a:r>
+          </a:p>
+          <a:p>
+            <a:pPr>
+              <a:spcAft>
+                <a:spcPts val="500"/>
+              </a:spcAft>
+            </a:pPr>
+            <a:r>
+              <a:rPr sz="1700" b="0" i="0">
+                <a:solidFill>
+                  <a:srgbClr val="8A97A3"/>
+                </a:solidFill>
+                <a:latin typeface="Arial"/>
+              </a:rPr>
+              <a:t>exploited; merchant channels drained. Patching stopped new access — it</a:t>
+            </a:r>
+          </a:p>
+          <a:p>
+            <a:pPr>
+              <a:spcAft>
+                <a:spcPts val="500"/>
+              </a:spcAft>
+            </a:pPr>
+            <a:r>
+              <a:rPr sz="1700" b="0" i="0">
+                <a:solidFill>
+                  <a:srgbClr val="8A97A3"/>
+                </a:solidFill>
+                <a:latin typeface="Arial"/>
+              </a:rPr>
+              <a:t>did not invalidate the credentials already stolen.</a:t>
+            </a:r>
+          </a:p>
+          <a:p>
+            <a:pPr>
+              <a:spcAft>
+                <a:spcPts val="500"/>
+              </a:spcAft>
+            </a:pPr>
+            <a:r>
+              <a:rPr sz="1700" b="0" i="0">
+                <a:solidFill>
+                  <a:srgbClr val="8A97A3"/>
+                </a:solidFill>
+                <a:latin typeface="Arial"/>
+              </a:rPr>
+              <a:t/>
+            </a:r>
+          </a:p>
+          <a:p>
+            <a:pPr>
+              <a:spcAft>
+                <a:spcPts val="500"/>
+              </a:spcAft>
+            </a:pPr>
+            <a:r>
+              <a:rPr sz="1900" b="1" i="0">
+                <a:solidFill>
+                  <a:srgbClr val="7FD8E8"/>
+                </a:solidFill>
+                <a:latin typeface="Arial"/>
+              </a:rPr>
+              <a:t>Core Lightning  ·  told to go offline</a:t>
+            </a:r>
+          </a:p>
+          <a:p>
+            <a:pPr>
+              <a:spcAft>
+                <a:spcPts val="500"/>
+              </a:spcAft>
+            </a:pPr>
+            <a:r>
+              <a:rPr sz="1700" b="0" i="0">
+                <a:solidFill>
+                  <a:srgbClr val="8A97A3"/>
+                </a:solidFill>
+                <a:latin typeface="Arial"/>
+              </a:rPr>
+              <a:t>Multiple critical flaws, source withheld 14 days so they could not be</a:t>
+            </a:r>
+          </a:p>
+          <a:p>
+            <a:pPr>
+              <a:spcAft>
+                <a:spcPts val="500"/>
+              </a:spcAft>
+            </a:pPr>
+            <a:r>
+              <a:rPr sz="1700" b="0" i="0">
+                <a:solidFill>
+                  <a:srgbClr val="8A97A3"/>
+                </a:solidFill>
+                <a:latin typeface="Arial"/>
+              </a:rPr>
+              <a:t>reverse-engineered. Upgrade, or restart with --offline.</a:t>
+            </a:r>
+          </a:p>
+          <a:p>
+            <a:pPr>
+              <a:spcAft>
+                <a:spcPts val="500"/>
+              </a:spcAft>
+            </a:pPr>
+            <a:r>
+              <a:rPr sz="1700" b="0" i="0">
+                <a:solidFill>
+                  <a:srgbClr val="8A97A3"/>
+                </a:solidFill>
+                <a:latin typeface="Arial"/>
+              </a:rPr>
+              <a:t/>
+            </a:r>
+          </a:p>
+          <a:p>
+            <a:pPr>
+              <a:spcAft>
+                <a:spcPts val="500"/>
+              </a:spcAft>
+            </a:pPr>
+            <a:r>
+              <a:rPr sz="1900" b="1" i="0">
+                <a:solidFill>
+                  <a:srgbClr val="7FD8E8"/>
+                </a:solidFill>
+                <a:latin typeface="Arial"/>
+              </a:rPr>
+              <a:t>LND  ·  cooperative close</a:t>
+            </a:r>
+          </a:p>
+          <a:p>
+            <a:pPr>
+              <a:spcAft>
+                <a:spcPts val="500"/>
+              </a:spcAft>
+            </a:pPr>
+            <a:r>
+              <a:rPr sz="1700" b="0" i="0">
+                <a:solidFill>
+                  <a:srgbClr val="8A97A3"/>
+                </a:solidFill>
+                <a:latin typeface="Arial"/>
+              </a:rPr>
+              <a:t>A channel-close flaw putting an entire channel balance at risk.</a:t>
+            </a:r>
+          </a:p>
+        </p:txBody>
+      </p:sp>
+      <p:sp>
+        <p:nvSpPr>
+          <p:cNvPr id="6" name="TextBox 5"/>
+          <p:cNvSpPr txBox="1"/>
+          <p:nvPr/>
+        </p:nvSpPr>
+        <p:spPr>
+          <a:xfrm>
+            <a:off x="822960" y="5989320"/>
+            <a:ext cx="10515600" cy="457200"/>
+          </a:xfrm>
+          <a:prstGeom prst="rect">
+            <a:avLst/>
+          </a:prstGeom>
+          <a:noFill/>
+        </p:spPr>
+        <p:txBody>
+          <a:bodyPr wrap="square" lIns="0" rIns="0" tIns="0" bIns="0">
+            <a:spAutoFit/>
+          </a:bodyPr>
+          <a:lstStyle/>
+          <a:p>
+            <a:pPr>
+              <a:spcAft>
+                <a:spcPts val="0"/>
+              </a:spcAft>
+            </a:pPr>
+            <a:r>
               <a:rPr sz="1400" b="0" i="1">
                 <a:solidFill>
                   <a:srgbClr val="8A97A3"/>
                 </a:solidFill>
                 <a:latin typeface="Arial"/>
               </a:rPr>
-              <a:t>Three roles, three protocols, and a signer the node cannot talk past.</a:t>
+              <a:t>Two of these are the shape, not the code: a credential that can be stolen, and an interface that can be reached.</a:t>
             </a:r>
           </a:p>
         </p:txBody>
@@ -3828,21 +4326,45 @@
                 </a:solidFill>
                 <a:latin typeface="Arial"/>
               </a:rPr>
-              <a:t>SEPARATION OF POWERS</a:t>
-            </a:r>
-          </a:p>
-        </p:txBody>
-      </p:sp>
-      <p:sp>
-        <p:nvSpPr>
-          <p:cNvPr id="4" name="TextBox 3"/>
+              <a:t>THE ARCHITECTURE</a:t>
+            </a:r>
+          </a:p>
+        </p:txBody>
+      </p:sp>
+      <p:pic>
+        <p:nvPicPr>
+          <p:cNvPr id="4" name="Picture 3" descr="design-dark.png"/>
+          <p:cNvPicPr>
+            <a:picLocks noChangeAspect="1"/>
+          </p:cNvPicPr>
+          <p:nvPr/>
+        </p:nvPicPr>
+        <p:blipFill>
+          <a:blip r:embed="rId2"/>
+          <a:stretch>
+            <a:fillRect/>
+          </a:stretch>
+        </p:blipFill>
+        <p:spPr>
+          <a:xfrm>
+            <a:off x="2599829" y="1024128"/>
+            <a:ext cx="6992037" cy="4892040"/>
+          </a:xfrm>
+          <a:prstGeom prst="rect">
+            <a:avLst/>
+          </a:prstGeom>
+        </p:spPr>
+      </p:pic>
+      <p:sp>
+        <p:nvSpPr>
+          <p:cNvPr id="5" name="TextBox 4"/>
           <p:cNvSpPr txBox="1"/>
           <p:nvPr/>
         </p:nvSpPr>
         <p:spPr>
           <a:xfrm>
-            <a:off x="822960" y="1051560"/>
-            <a:ext cx="10515600" cy="1280160"/>
+            <a:off x="822960" y="5989320"/>
+            <a:ext cx="10515600" cy="457200"/>
           </a:xfrm>
           <a:prstGeom prst="rect">
             <a:avLst/>
@@ -3861,171 +4383,13 @@
               </a:spcAft>
             </a:pPr>
             <a:r>
-              <a:rPr sz="4000" b="1" i="0">
-                <a:solidFill>
-                  <a:srgbClr val="E8EDF2"/>
-                </a:solidFill>
-                <a:latin typeface="Arial"/>
-              </a:rPr>
-              <a:t>Three roles, and none of them is trusted twice</a:t>
-            </a:r>
-          </a:p>
-        </p:txBody>
-      </p:sp>
-      <p:sp>
-        <p:nvSpPr>
-          <p:cNvPr id="5" name="TextBox 4"/>
-          <p:cNvSpPr txBox="1"/>
-          <p:nvPr/>
-        </p:nvSpPr>
-        <p:spPr>
-          <a:xfrm>
-            <a:off x="822960" y="2286000"/>
-            <a:ext cx="10515600" cy="3840480"/>
-          </a:xfrm>
-          <a:prstGeom prst="rect">
-            <a:avLst/>
-          </a:prstGeom>
-          <a:noFill/>
-        </p:spPr>
-        <p:txBody>
-          <a:bodyPr wrap="square" lIns="0" rIns="0" tIns="0" bIns="0">
-            <a:spAutoFit/>
-          </a:bodyPr>
-          <a:lstStyle/>
-          <a:p>
-            <a:pPr>
-              <a:spcAft>
-                <a:spcPts val="600"/>
-              </a:spcAft>
-            </a:pPr>
-            <a:r>
-              <a:rPr sz="2000" b="1" i="0">
-                <a:solidFill>
-                  <a:srgbClr val="7FD8E8"/>
-                </a:solidFill>
-                <a:latin typeface="Arial"/>
-              </a:rPr>
-              <a:t>Owner</a:t>
-            </a:r>
-          </a:p>
-          <a:p>
-            <a:pPr>
-              <a:spcAft>
-                <a:spcPts val="600"/>
-              </a:spcAft>
-            </a:pPr>
-            <a:r>
-              <a:rPr sz="1800" b="0" i="0">
+              <a:rPr sz="1400" b="0" i="1">
                 <a:solidFill>
                   <a:srgbClr val="8A97A3"/>
                 </a:solidFill>
                 <a:latin typeface="Arial"/>
               </a:rPr>
-              <a:t>Defines the signing policy. Touches nothing day to day.</a:t>
-            </a:r>
-          </a:p>
-          <a:p>
-            <a:pPr>
-              <a:spcAft>
-                <a:spcPts val="600"/>
-              </a:spcAft>
-            </a:pPr>
-            <a:r>
-              <a:rPr sz="2000" b="1" i="0">
-                <a:solidFill>
-                  <a:srgbClr val="7FD8E8"/>
-                </a:solidFill>
-                <a:latin typeface="Arial"/>
-              </a:rPr>
-              <a:t>User</a:t>
-            </a:r>
-          </a:p>
-          <a:p>
-            <a:pPr>
-              <a:spcAft>
-                <a:spcPts val="600"/>
-              </a:spcAft>
-            </a:pPr>
-            <a:r>
-              <a:rPr sz="1800" b="0" i="0">
-                <a:solidFill>
-                  <a:srgbClr val="8A97A3"/>
-                </a:solidFill>
-                <a:latin typeface="Arial"/>
-              </a:rPr>
-              <a:t>Spends through the wallet, within the Owner's permissions and limits.</a:t>
-            </a:r>
-          </a:p>
-          <a:p>
-            <a:pPr>
-              <a:spcAft>
-                <a:spcPts val="600"/>
-              </a:spcAft>
-            </a:pPr>
-            <a:r>
-              <a:rPr sz="2000" b="1" i="0">
-                <a:solidFill>
-                  <a:srgbClr val="7FD8E8"/>
-                </a:solidFill>
-                <a:latin typeface="Arial"/>
-              </a:rPr>
-              <a:t>Controller</a:t>
-            </a:r>
-          </a:p>
-          <a:p>
-            <a:pPr>
-              <a:spcAft>
-                <a:spcPts val="600"/>
-              </a:spcAft>
-            </a:pPr>
-            <a:r>
-              <a:rPr sz="1800" b="0" i="0">
-                <a:solidFill>
-                  <a:srgbClr val="8A97A3"/>
-                </a:solidFill>
-                <a:latin typeface="Arial"/>
-              </a:rPr>
-              <a:t>Operates the node — channels, peers, fees — under the same policy.</a:t>
-            </a:r>
-          </a:p>
-        </p:txBody>
-      </p:sp>
-      <p:sp>
-        <p:nvSpPr>
-          <p:cNvPr id="6" name="TextBox 5"/>
-          <p:cNvSpPr txBox="1"/>
-          <p:nvPr/>
-        </p:nvSpPr>
-        <p:spPr>
-          <a:xfrm>
-            <a:off x="822960" y="5989320"/>
-            <a:ext cx="10515600" cy="457200"/>
-          </a:xfrm>
-          <a:prstGeom prst="rect">
-            <a:avLst/>
-          </a:prstGeom>
-          <a:noFill/>
-        </p:spPr>
-        <p:txBody>
-          <a:bodyPr wrap="square" lIns="0" rIns="0" tIns="0" bIns="0">
-            <a:spAutoFit/>
-          </a:bodyPr>
-          <a:lstStyle/>
-          <a:p>
-            <a:pPr>
-              <a:spcAft>
-                <a:spcPts val="0"/>
-              </a:spcAft>
-            </a:pPr>
-            <a:r>
-              <a:rPr sz="1400" b="0" i="1">
-                <a:solidFill>
-                  <a:srgbClr val="8A97A3"/>
-                </a:solidFill>
-                <a:latin typeface="Arial"/>
-              </a:rPr>
-              <a:t>A role is a key, not an account. Capabilities are granted per key and per method.</a:t>
+              <a:t>Three roles, three protocols, and a signer the node cannot talk past.</a:t>
             </a:r>
           </a:p>
         </p:txBody>
@@ -4126,7 +4490,7 @@
                 </a:solidFill>
                 <a:latin typeface="Arial"/>
               </a:rPr>
-              <a:t>ONE TRANSPORT, THREE PROTOCOLS</a:t>
+              <a:t>SEPARATION OF POWERS</a:t>
             </a:r>
           </a:p>
         </p:txBody>
@@ -4165,7 +4529,7 @@
                 </a:solidFill>
                 <a:latin typeface="Arial"/>
               </a:rPr>
-              <a:t>Nostr is the only control plane</a:t>
+              <a:t>Three roles, and none of them is trusted twice</a:t>
             </a:r>
           </a:p>
         </p:txBody>
@@ -4178,7 +4542,7 @@
         </p:nvSpPr>
         <p:spPr>
           <a:xfrm>
-            <a:off x="822960" y="2240280"/>
+            <a:off x="822960" y="2286000"/>
             <a:ext cx="10515600" cy="3840480"/>
           </a:xfrm>
           <a:prstGeom prst="rect">
@@ -4204,7 +4568,7 @@
                 </a:solidFill>
                 <a:latin typeface="Arial"/>
               </a:rPr>
-              <a:t>NWC   ·   the wallet</a:t>
+              <a:t>Owner</a:t>
             </a:r>
           </a:p>
           <a:p>
@@ -4220,7 +4584,7 @@
                 </a:solidFill>
                 <a:latin typeface="Arial"/>
               </a:rPr>
-              <a:t>Invoices, payments, offers, on-chain. Extends NIP-47.</a:t>
+              <a:t>Defines the signing policy. Touches nothing day to day.</a:t>
             </a:r>
           </a:p>
           <a:p>
@@ -4236,7 +4600,7 @@
                 </a:solidFill>
                 <a:latin typeface="Arial"/>
               </a:rPr>
-              <a:t>NCC   ·   the node</a:t>
+              <a:t>User</a:t>
             </a:r>
           </a:p>
           <a:p>
@@ -4252,7 +4616,7 @@
                 </a:solidFill>
                 <a:latin typeface="Arial"/>
               </a:rPr>
-              <a:t>Channels, peers, fees, routing, network queries.</a:t>
+              <a:t>Spends through the wallet, within the Owner's permissions and limits.</a:t>
             </a:r>
           </a:p>
           <a:p>
@@ -4268,7 +4632,7 @@
                 </a:solidFill>
                 <a:latin typeface="Arial"/>
               </a:rPr>
-              <a:t>NSC   ·   the signer</a:t>
+              <a:t>Controller</a:t>
             </a:r>
           </a:p>
           <a:p>
@@ -4284,7 +4648,7 @@
                 </a:solidFill>
                 <a:latin typeface="Arial"/>
               </a:rPr>
-              <a:t>Signing requests, and the policy that governs them.</a:t>
+              <a:t>Operates the node — channels, peers, fees — under the same policy.</a:t>
             </a:r>
           </a:p>
         </p:txBody>
@@ -4323,7 +4687,7 @@
                 </a:solidFill>
                 <a:latin typeface="Arial"/>
               </a:rPr>
-              <a:t>No CLI. No local socket. Nothing listens for control — the node reaches out to a relay.</a:t>
+              <a:t>A role is a key, not an account. Capabilities are granted per key and per method.</a:t>
             </a:r>
           </a:p>
         </p:txBody>
@@ -4424,7 +4788,7 @@
                 </a:solidFill>
                 <a:latin typeface="Arial"/>
               </a:rPr>
-              <a:t>WHY THE SHAPE MATTERS</a:t>
+              <a:t>ONE TRANSPORT, THREE PROTOCOLS</a:t>
             </a:r>
           </a:p>
         </p:txBody>
@@ -4457,14 +4821,13 @@
               </a:spcAft>
             </a:pPr>
             <a:r>
-              <a:rPr sz="3800" b="1" i="0">
+              <a:rPr sz="4000" b="1" i="0">
                 <a:solidFill>
                   <a:srgbClr val="E8EDF2"/>
                 </a:solidFill>
                 <a:latin typeface="Arial"/>
               </a:rPr>
-              <a:t>Policy lives in the signer,
-not in the node</a:t>
+              <a:t>Nostr is the only control plane</a:t>
             </a:r>
           </a:p>
         </p:txBody>
@@ -4477,7 +4840,7 @@
         </p:nvSpPr>
         <p:spPr>
           <a:xfrm>
-            <a:off x="822960" y="2834640"/>
+            <a:off x="822960" y="2240280"/>
             <a:ext cx="10515600" cy="3840480"/>
           </a:xfrm>
           <a:prstGeom prst="rect">
@@ -4493,39 +4856,23 @@
           <a:p>
             <a:pPr>
               <a:spcAft>
-                <a:spcPts val="800"/>
-              </a:spcAft>
-            </a:pPr>
-            <a:r>
-              <a:rPr sz="2000" b="0" i="0">
-                <a:solidFill>
-                  <a:srgbClr val="E8EDF2"/>
-                </a:solidFill>
-                <a:latin typeface="Arial"/>
-              </a:rPr>
-              <a:t>The keys are not the node's. Every signature is a request the signer</a:t>
-            </a:r>
-          </a:p>
-          <a:p>
-            <a:pPr>
-              <a:spcAft>
-                <a:spcPts val="800"/>
-              </a:spcAft>
-            </a:pPr>
-            <a:r>
-              <a:rPr sz="2000" b="0" i="0">
-                <a:solidFill>
-                  <a:srgbClr val="E8EDF2"/>
-                </a:solidFill>
-                <a:latin typeface="Arial"/>
-              </a:rPr>
-              <a:t>validates against the Owner's policy — and can refuse.</a:t>
-            </a:r>
-          </a:p>
-          <a:p>
-            <a:pPr>
-              <a:spcAft>
-                <a:spcPts val="800"/>
+                <a:spcPts val="600"/>
+              </a:spcAft>
+            </a:pPr>
+            <a:r>
+              <a:rPr sz="2000" b="1" i="0">
+                <a:solidFill>
+                  <a:srgbClr val="7FD8E8"/>
+                </a:solidFill>
+                <a:latin typeface="Arial"/>
+              </a:rPr>
+              <a:t>NWC   ·   the wallet</a:t>
+            </a:r>
+          </a:p>
+          <a:p>
+            <a:pPr>
+              <a:spcAft>
+                <a:spcPts val="600"/>
               </a:spcAft>
             </a:pPr>
             <a:r>
@@ -4535,13 +4882,13 @@
                 </a:solidFill>
                 <a:latin typeface="Arial"/>
               </a:rPr>
-              <a:t/>
-            </a:r>
-          </a:p>
-          <a:p>
-            <a:pPr>
-              <a:spcAft>
-                <a:spcPts val="800"/>
+              <a:t>Invoices, payments, offers, on-chain. Extends NIP-47.</a:t>
+            </a:r>
+          </a:p>
+          <a:p>
+            <a:pPr>
+              <a:spcAft>
+                <a:spcPts val="600"/>
               </a:spcAft>
             </a:pPr>
             <a:r>
@@ -4551,13 +4898,29 @@
                 </a:solidFill>
                 <a:latin typeface="Arial"/>
               </a:rPr>
-              <a:t>A user or controller cannot make the signer approve an operation</a:t>
-            </a:r>
-          </a:p>
-          <a:p>
-            <a:pPr>
-              <a:spcAft>
-                <a:spcPts val="800"/>
+              <a:t>NCC   ·   the node</a:t>
+            </a:r>
+          </a:p>
+          <a:p>
+            <a:pPr>
+              <a:spcAft>
+                <a:spcPts val="600"/>
+              </a:spcAft>
+            </a:pPr>
+            <a:r>
+              <a:rPr sz="1800" b="0" i="0">
+                <a:solidFill>
+                  <a:srgbClr val="8A97A3"/>
+                </a:solidFill>
+                <a:latin typeface="Arial"/>
+              </a:rPr>
+              <a:t>Channels, peers, fees, routing, network queries.</a:t>
+            </a:r>
+          </a:p>
+          <a:p>
+            <a:pPr>
+              <a:spcAft>
+                <a:spcPts val="600"/>
               </a:spcAft>
             </a:pPr>
             <a:r>
@@ -4567,13 +4930,13 @@
                 </a:solidFill>
                 <a:latin typeface="Arial"/>
               </a:rPr>
-              <a:t>outside that policy merely by controlling dln-node.</a:t>
-            </a:r>
-          </a:p>
-          <a:p>
-            <a:pPr>
-              <a:spcAft>
-                <a:spcPts val="800"/>
+              <a:t>NSC   ·   the signer</a:t>
+            </a:r>
+          </a:p>
+          <a:p>
+            <a:pPr>
+              <a:spcAft>
+                <a:spcPts val="600"/>
               </a:spcAft>
             </a:pPr>
             <a:r>
@@ -4583,23 +4946,46 @@
                 </a:solidFill>
                 <a:latin typeface="Arial"/>
               </a:rPr>
-              <a:t/>
-            </a:r>
-          </a:p>
-          <a:p>
-            <a:pPr>
-              <a:spcAft>
-                <a:spcPts val="800"/>
-              </a:spcAft>
-            </a:pPr>
-            <a:r>
-              <a:rPr sz="2000" b="0" i="0">
-                <a:solidFill>
-                  <a:srgbClr val="E8EDF2"/>
-                </a:solidFill>
-                <a:latin typeface="Arial"/>
-              </a:rPr>
-              <a:t>—   The signer can run inside an attested secure enclave.</a:t>
+              <a:t>Signing requests, and the policy that governs them.</a:t>
+            </a:r>
+          </a:p>
+        </p:txBody>
+      </p:sp>
+      <p:sp>
+        <p:nvSpPr>
+          <p:cNvPr id="6" name="TextBox 5"/>
+          <p:cNvSpPr txBox="1"/>
+          <p:nvPr/>
+        </p:nvSpPr>
+        <p:spPr>
+          <a:xfrm>
+            <a:off x="822960" y="5989320"/>
+            <a:ext cx="10515600" cy="457200"/>
+          </a:xfrm>
+          <a:prstGeom prst="rect">
+            <a:avLst/>
+          </a:prstGeom>
+          <a:noFill/>
+        </p:spPr>
+        <p:txBody>
+          <a:bodyPr wrap="square" lIns="0" rIns="0" tIns="0" bIns="0">
+            <a:spAutoFit/>
+          </a:bodyPr>
+          <a:lstStyle/>
+          <a:p>
+            <a:pPr>
+              <a:spcAft>
+                <a:spcPts val="0"/>
+              </a:spcAft>
+            </a:pPr>
+            <a:r>
+              <a:rPr sz="1400" b="0" i="1">
+                <a:solidFill>
+                  <a:srgbClr val="8A97A3"/>
+                </a:solidFill>
+                <a:latin typeface="Arial"/>
+              </a:rPr>
+              <a:t>No CLI. No local socket. Nothing listens for control — the node reaches out to a relay.</a:t>
             </a:r>
           </a:p>
         </p:txBody>
@@ -4700,7 +5086,7 @@
                 </a:solidFill>
                 <a:latin typeface="Arial"/>
               </a:rPr>
-              <a:t>WHAT IT UNLOCKS</a:t>
+              <a:t>WHY THE SHAPE MATTERS</a:t>
             </a:r>
           </a:p>
         </p:txBody>
@@ -4733,13 +5119,14 @@
               </a:spcAft>
             </a:pPr>
             <a:r>
-              <a:rPr sz="4000" b="1" i="0">
+              <a:rPr sz="3800" b="1" i="0">
                 <a:solidFill>
                   <a:srgbClr val="E8EDF2"/>
                 </a:solidFill>
                 <a:latin typeface="Arial"/>
               </a:rPr>
-              <a:t>diamond-x — swapping BTC against BTK</a:t>
+              <a:t>Policy lives in the signer,
+not in the node</a:t>
             </a:r>
           </a:p>
         </p:txBody>
@@ -4752,7 +5139,7 @@
         </p:nvSpPr>
         <p:spPr>
           <a:xfrm>
-            <a:off x="822960" y="2286000"/>
+            <a:off x="822960" y="2834640"/>
             <a:ext cx="10515600" cy="3840480"/>
           </a:xfrm>
           <a:prstGeom prst="rect">
@@ -4768,7 +5155,7 @@
           <a:p>
             <a:pPr>
               <a:spcAft>
-                <a:spcPts val="1200"/>
+                <a:spcPts val="800"/>
               </a:spcAft>
             </a:pPr>
             <a:r>
@@ -4778,13 +5165,13 @@
                 </a:solidFill>
                 <a:latin typeface="Arial"/>
               </a:rPr>
-              <a:t>Two chains, two channels, one payment hash.</a:t>
-            </a:r>
-          </a:p>
-          <a:p>
-            <a:pPr>
-              <a:spcAft>
-                <a:spcPts val="1200"/>
+              <a:t>The keys are not the node's. Every signature is a request the signer</a:t>
+            </a:r>
+          </a:p>
+          <a:p>
+            <a:pPr>
+              <a:spcAft>
+                <a:spcPts val="800"/>
               </a:spcAft>
             </a:pPr>
             <a:r>
@@ -4794,13 +5181,13 @@
                 </a:solidFill>
                 <a:latin typeface="Arial"/>
               </a:rPr>
-              <a:t>Neither side can take their leg without enabling the other.</a:t>
-            </a:r>
-          </a:p>
-          <a:p>
-            <a:pPr>
-              <a:spcAft>
-                <a:spcPts val="1200"/>
+              <a:t>validates against the Owner's policy — and can refuse.</a:t>
+            </a:r>
+          </a:p>
+          <a:p>
+            <a:pPr>
+              <a:spcAft>
+                <a:spcPts val="800"/>
               </a:spcAft>
             </a:pPr>
             <a:r>
@@ -4816,7 +5203,55 @@
           <a:p>
             <a:pPr>
               <a:spcAft>
-                <a:spcPts val="1200"/>
+                <a:spcPts val="800"/>
+              </a:spcAft>
+            </a:pPr>
+            <a:r>
+              <a:rPr sz="2000" b="1" i="0">
+                <a:solidFill>
+                  <a:srgbClr val="7FD8E8"/>
+                </a:solidFill>
+                <a:latin typeface="Arial"/>
+              </a:rPr>
+              <a:t>A user or controller cannot make the signer approve an operation</a:t>
+            </a:r>
+          </a:p>
+          <a:p>
+            <a:pPr>
+              <a:spcAft>
+                <a:spcPts val="800"/>
+              </a:spcAft>
+            </a:pPr>
+            <a:r>
+              <a:rPr sz="2000" b="1" i="0">
+                <a:solidFill>
+                  <a:srgbClr val="7FD8E8"/>
+                </a:solidFill>
+                <a:latin typeface="Arial"/>
+              </a:rPr>
+              <a:t>outside that policy merely by controlling dln-node.</a:t>
+            </a:r>
+          </a:p>
+          <a:p>
+            <a:pPr>
+              <a:spcAft>
+                <a:spcPts val="800"/>
+              </a:spcAft>
+            </a:pPr>
+            <a:r>
+              <a:rPr sz="1800" b="0" i="0">
+                <a:solidFill>
+                  <a:srgbClr val="8A97A3"/>
+                </a:solidFill>
+                <a:latin typeface="Arial"/>
+              </a:rPr>
+              <a:t/>
+            </a:r>
+          </a:p>
+          <a:p>
+            <a:pPr>
+              <a:spcAft>
+                <a:spcPts val="800"/>
               </a:spcAft>
             </a:pPr>
             <a:r>
@@ -4826,101 +5261,7 @@
                 </a:solidFill>
                 <a:latin typeface="Arial"/>
               </a:rPr>
-              <a:t>—   Hold invoices are the primitive that makes it atomic</a:t>
-            </a:r>
-          </a:p>
-          <a:p>
-            <a:pPr>
-              <a:spcAft>
-                <a:spcPts val="1200"/>
-              </a:spcAft>
-            </a:pPr>
-            <a:r>
-              <a:rPr sz="2000" b="0" i="0">
-                <a:solidFill>
-                  <a:srgbClr val="E8EDF2"/>
-                </a:solidFill>
-                <a:latin typeface="Arial"/>
-              </a:rPr>
-              <a:t>—   No custody: the exchange relays two parallel legs, holding nothing</a:t>
-            </a:r>
-          </a:p>
-        </p:txBody>
-      </p:sp>
-      <p:sp>
-        <p:nvSpPr>
-          <p:cNvPr id="6" name="TextBox 5"/>
-          <p:cNvSpPr txBox="1"/>
-          <p:nvPr/>
-        </p:nvSpPr>
-        <p:spPr>
-          <a:xfrm>
-            <a:off x="822960" y="4709160"/>
-            <a:ext cx="10515600" cy="1097280"/>
-          </a:xfrm>
-          <a:prstGeom prst="rect">
-            <a:avLst/>
-          </a:prstGeom>
-          <a:noFill/>
-        </p:spPr>
-        <p:txBody>
-          <a:bodyPr wrap="square" lIns="0" rIns="0" tIns="0" bIns="0">
-            <a:spAutoFit/>
-          </a:bodyPr>
-          <a:lstStyle/>
-          <a:p>
-            <a:pPr>
-              <a:spcAft>
-                <a:spcPts val="0"/>
-              </a:spcAft>
-            </a:pPr>
-            <a:r>
-              <a:rPr sz="4400" b="1" i="0">
-                <a:solidFill>
-                  <a:srgbClr val="7FD8E8"/>
-                </a:solidFill>
-                <a:latin typeface="Arial"/>
-              </a:rPr>
-              <a:t>3.7 seconds</a:t>
-            </a:r>
-          </a:p>
-        </p:txBody>
-      </p:sp>
-      <p:sp>
-        <p:nvSpPr>
-          <p:cNvPr id="7" name="TextBox 6"/>
-          <p:cNvSpPr txBox="1"/>
-          <p:nvPr/>
-        </p:nvSpPr>
-        <p:spPr>
-          <a:xfrm>
-            <a:off x="822960" y="5989320"/>
-            <a:ext cx="10515600" cy="457200"/>
-          </a:xfrm>
-          <a:prstGeom prst="rect">
-            <a:avLst/>
-          </a:prstGeom>
-          <a:noFill/>
-        </p:spPr>
-        <p:txBody>
-          <a:bodyPr wrap="square" lIns="0" rIns="0" tIns="0" bIns="0">
-            <a:spAutoFit/>
-          </a:bodyPr>
-          <a:lstStyle/>
-          <a:p>
-            <a:pPr>
-              <a:spcAft>
-                <a:spcPts val="0"/>
-              </a:spcAft>
-            </a:pPr>
-            <a:r>
-              <a:rPr sz="1400" b="0" i="1">
-                <a:solidFill>
-                  <a:srgbClr val="8A97A3"/>
-                </a:solidFill>
-                <a:latin typeface="Arial"/>
-              </a:rPr>
-              <a:t>Measured end to end, on regtest — not projected.</a:t>
+              <a:t>—   The signer can run inside an attested secure enclave.</a:t>
             </a:r>
           </a:p>
         </p:txBody>
@@ -5021,7 +5362,7 @@
                 </a:solidFill>
                 <a:latin typeface="Arial"/>
               </a:rPr>
-              <a:t>PROVEN WHERE IT IS HARDEST</a:t>
+              <a:t>WHAT IT UNLOCKS</a:t>
             </a:r>
           </a:p>
         </p:txBody>
@@ -5060,7 +5401,7 @@
                 </a:solidFill>
                 <a:latin typeface="Arial"/>
               </a:rPr>
-              <a:t>Across a consensus fork, live</a:t>
+              <a:t>diamond-x — swapping BTC against BTK</a:t>
             </a:r>
           </a:p>
         </p:txBody>
@@ -5073,7 +5414,7 @@
         </p:nvSpPr>
         <p:spPr>
           <a:xfrm>
-            <a:off x="822960" y="2240280"/>
+            <a:off x="822960" y="2286000"/>
             <a:ext cx="10515600" cy="3840480"/>
           </a:xfrm>
           <a:prstGeom prst="rect">
@@ -5089,7 +5430,39 @@
           <a:p>
             <a:pPr>
               <a:spcAft>
-                <a:spcPts val="1100"/>
+                <a:spcPts val="1200"/>
+              </a:spcAft>
+            </a:pPr>
+            <a:r>
+              <a:rPr sz="2000" b="0" i="0">
+                <a:solidFill>
+                  <a:srgbClr val="E8EDF2"/>
+                </a:solidFill>
+                <a:latin typeface="Arial"/>
+              </a:rPr>
+              <a:t>Two chains, two channels, one payment hash.</a:t>
+            </a:r>
+          </a:p>
+          <a:p>
+            <a:pPr>
+              <a:spcAft>
+                <a:spcPts val="1200"/>
+              </a:spcAft>
+            </a:pPr>
+            <a:r>
+              <a:rPr sz="2000" b="0" i="0">
+                <a:solidFill>
+                  <a:srgbClr val="E8EDF2"/>
+                </a:solidFill>
+                <a:latin typeface="Arial"/>
+              </a:rPr>
+              <a:t>Neither side can take their leg without enabling the other.</a:t>
+            </a:r>
+          </a:p>
+          <a:p>
+            <a:pPr>
+              <a:spcAft>
+                <a:spcPts val="1200"/>
               </a:spcAft>
             </a:pPr>
             <a:r>
@@ -5099,29 +5472,13 @@
                 </a:solidFill>
                 <a:latin typeface="Arial"/>
               </a:rPr>
-              <a:t>Bitcoin Knots changes the block header: 80 bytes to 164, and a new proof of work.</a:t>
-            </a:r>
-          </a:p>
-          <a:p>
-            <a:pPr>
-              <a:spcAft>
-                <a:spcPts val="1100"/>
-              </a:spcAft>
-            </a:pPr>
-            <a:r>
-              <a:rPr sz="1800" b="0" i="0">
-                <a:solidFill>
-                  <a:srgbClr val="8A97A3"/>
-                </a:solidFill>
-                <a:latin typeface="Arial"/>
-              </a:rPr>
               <a:t/>
             </a:r>
           </a:p>
           <a:p>
             <a:pPr>
               <a:spcAft>
-                <a:spcPts val="1100"/>
+                <a:spcPts val="1200"/>
               </a:spcAft>
             </a:pPr>
             <a:r>
@@ -5131,13 +5488,13 @@
                 </a:solidFill>
                 <a:latin typeface="Arial"/>
               </a:rPr>
-              <a:t>—   v2 header support through the whole Rust stack</a:t>
-            </a:r>
-          </a:p>
-          <a:p>
-            <a:pPr>
-              <a:spcAft>
-                <a:spcPts val="1100"/>
+              <a:t>—   Hold invoices are the primitive that makes it atomic</a:t>
+            </a:r>
+          </a:p>
+          <a:p>
+            <a:pPr>
+              <a:spcAft>
+                <a:spcPts val="1200"/>
               </a:spcAft>
             </a:pPr>
             <a:r>
@@ -5147,39 +5504,7 @@
                 </a:solidFill>
                 <a:latin typeface="Arial"/>
               </a:rPr>
-              <a:t>—   A node follows the chain across activation without losing a channel</a:t>
-            </a:r>
-          </a:p>
-          <a:p>
-            <a:pPr>
-              <a:spcAft>
-                <a:spcPts val="1100"/>
-              </a:spcAft>
-            </a:pPr>
-            <a:r>
-              <a:rPr sz="2000" b="0" i="0">
-                <a:solidFill>
-                  <a:srgbClr val="E8EDF2"/>
-                </a:solidFill>
-                <a:latin typeface="Arial"/>
-              </a:rPr>
-              <a:t>—   A swap with one leg on BTC and one on a BLAKE2b chain</a:t>
-            </a:r>
-          </a:p>
-          <a:p>
-            <a:pPr>
-              <a:spcAft>
-                <a:spcPts val="1100"/>
-              </a:spcAft>
-            </a:pPr>
-            <a:r>
-              <a:rPr sz="2000" b="0" i="0">
-                <a:solidFill>
-                  <a:srgbClr val="E8EDF2"/>
-                </a:solidFill>
-                <a:latin typeface="Arial"/>
-              </a:rPr>
-              <a:t>—   BKIP-0001 — the specification that did not exist, checked against Knots' own vectors</a:t>
+              <a:t>—   No custody: the exchange relays two parallel legs, holding nothing</a:t>
             </a:r>
           </a:p>
         </p:txBody>
@@ -5192,8 +5517,8 @@
         </p:nvSpPr>
         <p:spPr>
           <a:xfrm>
-            <a:off x="822960" y="5989320"/>
-            <a:ext cx="10515600" cy="457200"/>
+            <a:off x="822960" y="4709160"/>
+            <a:ext cx="10515600" cy="1097280"/>
           </a:xfrm>
           <a:prstGeom prst="rect">
             <a:avLst/>
@@ -5212,13 +5537,52 @@
               </a:spcAft>
             </a:pPr>
             <a:r>
+              <a:rPr sz="4400" b="1" i="0">
+                <a:solidFill>
+                  <a:srgbClr val="7FD8E8"/>
+                </a:solidFill>
+                <a:latin typeface="Arial"/>
+              </a:rPr>
+              <a:t>3.7 seconds</a:t>
+            </a:r>
+          </a:p>
+        </p:txBody>
+      </p:sp>
+      <p:sp>
+        <p:nvSpPr>
+          <p:cNvPr id="7" name="TextBox 6"/>
+          <p:cNvSpPr txBox="1"/>
+          <p:nvPr/>
+        </p:nvSpPr>
+        <p:spPr>
+          <a:xfrm>
+            <a:off x="822960" y="5989320"/>
+            <a:ext cx="10515600" cy="457200"/>
+          </a:xfrm>
+          <a:prstGeom prst="rect">
+            <a:avLst/>
+          </a:prstGeom>
+          <a:noFill/>
+        </p:spPr>
+        <p:txBody>
+          <a:bodyPr wrap="square" lIns="0" rIns="0" tIns="0" bIns="0">
+            <a:spAutoFit/>
+          </a:bodyPr>
+          <a:lstStyle/>
+          <a:p>
+            <a:pPr>
+              <a:spcAft>
+                <a:spcPts val="0"/>
+              </a:spcAft>
+            </a:pPr>
+            <a:r>
               <a:rPr sz="1400" b="0" i="1">
                 <a:solidFill>
                   <a:srgbClr val="8A97A3"/>
                 </a:solidFill>
                 <a:latin typeface="Arial"/>
               </a:rPr>
-              <a:t>And the negative control: without the support, the node stops dead at the fork.</a:t>
+              <a:t>Measured end to end, on regtest — not projected.</a:t>
             </a:r>
           </a:p>
         </p:txBody>
@@ -5319,7 +5683,7 @@
                 </a:solidFill>
                 <a:latin typeface="Arial"/>
               </a:rPr>
-              <a:t>WHERE IT STANDS</a:t>
+              <a:t>PROVEN WHERE IT IS HARDEST</a:t>
             </a:r>
           </a:p>
         </p:txBody>
@@ -5352,14 +5716,13 @@
               </a:spcAft>
             </a:pPr>
             <a:r>
-              <a:rPr sz="3800" b="1" i="0">
+              <a:rPr sz="4000" b="1" i="0">
                 <a:solidFill>
                   <a:srgbClr val="E8EDF2"/>
                 </a:solidFill>
                 <a:latin typeface="Arial"/>
               </a:rPr>
-              <a:t>Fast is demonstrated.
-Safe is not yet.</a:t>
+              <a:t>Across a consensus fork, live</a:t>
             </a:r>
           </a:p>
         </p:txBody>
@@ -5372,7 +5735,7 @@
         </p:nvSpPr>
         <p:spPr>
           <a:xfrm>
-            <a:off x="822960" y="3017520"/>
+            <a:off x="822960" y="2240280"/>
             <a:ext cx="10515600" cy="3840480"/>
           </a:xfrm>
           <a:prstGeom prst="rect">
@@ -5388,7 +5751,39 @@
           <a:p>
             <a:pPr>
               <a:spcAft>
-                <a:spcPts val="1200"/>
+                <a:spcPts val="1100"/>
+              </a:spcAft>
+            </a:pPr>
+            <a:r>
+              <a:rPr sz="1800" b="0" i="0">
+                <a:solidFill>
+                  <a:srgbClr val="8A97A3"/>
+                </a:solidFill>
+                <a:latin typeface="Arial"/>
+              </a:rPr>
+              <a:t>Bitcoin Knots changes the block header: 80 bytes to 164, and a new proof of work.</a:t>
+            </a:r>
+          </a:p>
+          <a:p>
+            <a:pPr>
+              <a:spcAft>
+                <a:spcPts val="1100"/>
+              </a:spcAft>
+            </a:pPr>
+            <a:r>
+              <a:rPr sz="1800" b="0" i="0">
+                <a:solidFill>
+                  <a:srgbClr val="8A97A3"/>
+                </a:solidFill>
+                <a:latin typeface="Arial"/>
+              </a:rPr>
+              <a:t/>
+            </a:r>
+          </a:p>
+          <a:p>
+            <a:pPr>
+              <a:spcAft>
+                <a:spcPts val="1100"/>
               </a:spcAft>
             </a:pPr>
             <a:r>
@@ -5398,13 +5793,13 @@
                 </a:solidFill>
                 <a:latin typeface="Arial"/>
               </a:rPr>
-              <a:t>—   Proven — the happy path, end to end, on both chains, across the fork</a:t>
-            </a:r>
-          </a:p>
-          <a:p>
-            <a:pPr>
-              <a:spcAft>
-                <a:spcPts val="1200"/>
+              <a:t>—   v2 header support through the whole Rust stack</a:t>
+            </a:r>
+          </a:p>
+          <a:p>
+            <a:pPr>
+              <a:spcAft>
+                <a:spcPts val="1100"/>
               </a:spcAft>
             </a:pPr>
             <a:r>
@@ -5414,29 +5809,13 @@
                 </a:solidFill>
                 <a:latin typeface="Arial"/>
               </a:rPr>
-              <a:t>—   Not proven — force closes, HTLC timeouts, on-chain claims</a:t>
-            </a:r>
-          </a:p>
-          <a:p>
-            <a:pPr>
-              <a:spcAft>
-                <a:spcPts val="1200"/>
-              </a:spcAft>
-            </a:pPr>
-            <a:r>
-              <a:rPr sz="1800" b="0" i="0">
-                <a:solidFill>
-                  <a:srgbClr val="8A97A3"/>
-                </a:solidFill>
-                <a:latin typeface="Arial"/>
-              </a:rPr>
-              <a:t/>
-            </a:r>
-          </a:p>
-          <a:p>
-            <a:pPr>
-              <a:spcAft>
-                <a:spcPts val="1200"/>
+              <a:t>—   A node follows the chain across activation without losing a channel</a:t>
+            </a:r>
+          </a:p>
+          <a:p>
+            <a:pPr>
+              <a:spcAft>
+                <a:spcPts val="1100"/>
               </a:spcAft>
             </a:pPr>
             <a:r>
@@ -5446,13 +5825,13 @@
                 </a:solidFill>
                 <a:latin typeface="Arial"/>
               </a:rPr>
-              <a:t>Every scenario so far ends with both parties cooperating. The safety</a:t>
-            </a:r>
-          </a:p>
-          <a:p>
-            <a:pPr>
-              <a:spcAft>
-                <a:spcPts val="1200"/>
+              <a:t>—   A swap with one leg on BTC and one on a BLAKE2b chain</a:t>
+            </a:r>
+          </a:p>
+          <a:p>
+            <a:pPr>
+              <a:spcAft>
+                <a:spcPts val="1100"/>
               </a:spcAft>
             </a:pPr>
             <a:r>
@@ -5462,7 +5841,7 @@
                 </a:solidFill>
                 <a:latin typeface="Arial"/>
               </a:rPr>
-              <a:t>argument rests entirely on what happens when one of them does not.</a:t>
+              <a:t>—   BKIP-0001 — the specification that did not exist, checked against Knots' own vectors</a:t>
             </a:r>
           </a:p>
         </p:txBody>
@@ -5501,7 +5880,7 @@
                 </a:solidFill>
                 <a:latin typeface="Arial"/>
               </a:rPr>
-              <a:t>That is the next mission, and it is deliberately not claimed yet.</a:t>
+              <a:t>And the negative control: without the support, the node stops dead at the fork.</a:t>
             </a:r>
           </a:p>
         </p:txBody>

--- a/doc/diamond-lightning-node.pptx
+++ b/doc/diamond-lightning-node.pptx
@@ -3730,14 +3730,13 @@
               </a:spcAft>
             </a:pPr>
             <a:r>
-              <a:rPr sz="3800" b="1" i="0">
+              <a:rPr sz="4000" b="1" i="0">
                 <a:solidFill>
                   <a:srgbClr val="E8EDF2"/>
                 </a:solidFill>
                 <a:latin typeface="Arial"/>
               </a:rPr>
-              <a:t>A Lightning node is a hot wallet
-with a web server attached</a:t>
+              <a:t>Traditionally, a node is built like an egg</a:t>
             </a:r>
           </a:p>
         </p:txBody>
@@ -3750,7 +3749,7 @@
         </p:nvSpPr>
         <p:spPr>
           <a:xfrm>
-            <a:off x="822960" y="2880360"/>
+            <a:off x="822960" y="2651760"/>
             <a:ext cx="10515600" cy="3840480"/>
           </a:xfrm>
           <a:prstGeom prst="rect">
@@ -3766,7 +3765,39 @@
           <a:p>
             <a:pPr>
               <a:spcAft>
-                <a:spcPts val="1600"/>
+                <a:spcPts val="1400"/>
+              </a:spcAft>
+            </a:pPr>
+            <a:r>
+              <a:rPr sz="1800" b="0" i="0">
+                <a:solidFill>
+                  <a:srgbClr val="8A97A3"/>
+                </a:solidFill>
+                <a:latin typeface="Arial"/>
+              </a:rPr>
+              <a:t>A hot wallet with a web server attached, behind a single perimeter.</a:t>
+            </a:r>
+          </a:p>
+          <a:p>
+            <a:pPr>
+              <a:spcAft>
+                <a:spcPts val="1400"/>
+              </a:spcAft>
+            </a:pPr>
+            <a:r>
+              <a:rPr sz="1800" b="0" i="0">
+                <a:solidFill>
+                  <a:srgbClr val="8A97A3"/>
+                </a:solidFill>
+                <a:latin typeface="Arial"/>
+              </a:rPr>
+              <a:t/>
+            </a:r>
+          </a:p>
+          <a:p>
+            <a:pPr>
+              <a:spcAft>
+                <a:spcPts val="1400"/>
               </a:spcAft>
             </a:pPr>
             <a:r>
@@ -3776,13 +3807,13 @@
                 </a:solidFill>
                 <a:latin typeface="Arial"/>
               </a:rPr>
-              <a:t>—   REST, gRPC, a CLI, macaroons — inbound surface, always listening</a:t>
-            </a:r>
-          </a:p>
-          <a:p>
-            <a:pPr>
-              <a:spcAft>
-                <a:spcPts val="1600"/>
+              <a:t>—   The shell  —  TLS, macaroons, a firewall, a VPN</a:t>
+            </a:r>
+          </a:p>
+          <a:p>
+            <a:pPr>
+              <a:spcAft>
+                <a:spcPts val="1400"/>
               </a:spcAft>
             </a:pPr>
             <a:r>
@@ -3792,13 +3823,13 @@
                 </a:solidFill>
                 <a:latin typeface="Arial"/>
               </a:rPr>
-              <a:t>—   The node holds the very keys it signs with</a:t>
-            </a:r>
-          </a:p>
-          <a:p>
-            <a:pPr>
-              <a:spcAft>
-                <a:spcPts val="1600"/>
+              <a:t>—   The centre  —  the API, the keys and the policy, together and trusted</a:t>
+            </a:r>
+          </a:p>
+          <a:p>
+            <a:pPr>
+              <a:spcAft>
+                <a:spcPts val="1400"/>
               </a:spcAft>
             </a:pPr>
             <a:r>
@@ -3808,7 +3839,7 @@
                 </a:solidFill>
                 <a:latin typeface="Arial"/>
               </a:rPr>
-              <a:t>—   Whoever controls the node controls the money</a:t>
+              <a:t>—   Crack the shell once, and there is nothing else to defeat</a:t>
             </a:r>
           </a:p>
         </p:txBody>
@@ -3847,7 +3878,7 @@
                 </a:solidFill>
                 <a:latin typeface="Arial"/>
               </a:rPr>
-              <a:t>Every common mitigation is a patch on that shape, not a change to it.</a:t>
+              <a:t>Every common mitigation hardens the shell. None of them changes what is inside it.</a:t>
             </a:r>
           </a:p>
         </p:txBody>
@@ -3981,13 +4012,14 @@
               </a:spcAft>
             </a:pPr>
             <a:r>
-              <a:rPr sz="3400" b="1" i="0">
+              <a:rPr sz="3800" b="1" i="0">
                 <a:solidFill>
                   <a:srgbClr val="E8EDF2"/>
                 </a:solidFill>
                 <a:latin typeface="Arial"/>
               </a:rPr>
-              <a:t>A summer of operators afraid of their own nodes</a:t>
+              <a:t>This summer, operators were afraid
+of an omelette</a:t>
             </a:r>
           </a:p>
         </p:txBody>
@@ -4000,7 +4032,7 @@
         </p:nvSpPr>
         <p:spPr>
           <a:xfrm>
-            <a:off x="822960" y="2148840"/>
+            <a:off x="822960" y="2487168"/>
             <a:ext cx="10515600" cy="3840480"/>
           </a:xfrm>
           <a:prstGeom prst="rect">
@@ -4016,11 +4048,11 @@
           <a:p>
             <a:pPr>
               <a:spcAft>
-                <a:spcPts val="500"/>
-              </a:spcAft>
-            </a:pPr>
-            <a:r>
-              <a:rPr sz="1900" b="1" i="0">
+                <a:spcPts val="400"/>
+              </a:spcAft>
+            </a:pPr>
+            <a:r>
+              <a:rPr sz="1800" b="1" i="0">
                 <a:solidFill>
                   <a:srgbClr val="7FD8E8"/>
                 </a:solidFill>
@@ -4032,11 +4064,11 @@
           <a:p>
             <a:pPr>
               <a:spcAft>
-                <a:spcPts val="500"/>
-              </a:spcAft>
-            </a:pPr>
-            <a:r>
-              <a:rPr sz="1700" b="0" i="0">
+                <a:spcPts val="400"/>
+              </a:spcAft>
+            </a:pPr>
+            <a:r>
+              <a:rPr sz="1600" b="0" i="0">
                 <a:solidFill>
                   <a:srgbClr val="8A97A3"/>
                 </a:solidFill>
@@ -4048,11 +4080,11 @@
           <a:p>
             <a:pPr>
               <a:spcAft>
-                <a:spcPts val="500"/>
-              </a:spcAft>
-            </a:pPr>
-            <a:r>
-              <a:rPr sz="1700" b="0" i="0">
+                <a:spcPts val="400"/>
+              </a:spcAft>
+            </a:pPr>
+            <a:r>
+              <a:rPr sz="1600" b="0" i="0">
                 <a:solidFill>
                   <a:srgbClr val="8A97A3"/>
                 </a:solidFill>
@@ -4064,11 +4096,11 @@
           <a:p>
             <a:pPr>
               <a:spcAft>
-                <a:spcPts val="500"/>
-              </a:spcAft>
-            </a:pPr>
-            <a:r>
-              <a:rPr sz="1700" b="0" i="0">
+                <a:spcPts val="400"/>
+              </a:spcAft>
+            </a:pPr>
+            <a:r>
+              <a:rPr sz="1600" b="0" i="0">
                 <a:solidFill>
                   <a:srgbClr val="8A97A3"/>
                 </a:solidFill>
@@ -4080,11 +4112,11 @@
           <a:p>
             <a:pPr>
               <a:spcAft>
-                <a:spcPts val="500"/>
-              </a:spcAft>
-            </a:pPr>
-            <a:r>
-              <a:rPr sz="1700" b="0" i="0">
+                <a:spcPts val="400"/>
+              </a:spcAft>
+            </a:pPr>
+            <a:r>
+              <a:rPr sz="1600" b="0" i="0">
                 <a:solidFill>
                   <a:srgbClr val="8A97A3"/>
                 </a:solidFill>
@@ -4096,11 +4128,11 @@
           <a:p>
             <a:pPr>
               <a:spcAft>
-                <a:spcPts val="500"/>
-              </a:spcAft>
-            </a:pPr>
-            <a:r>
-              <a:rPr sz="1900" b="1" i="0">
+                <a:spcPts val="400"/>
+              </a:spcAft>
+            </a:pPr>
+            <a:r>
+              <a:rPr sz="1800" b="1" i="0">
                 <a:solidFill>
                   <a:srgbClr val="7FD8E8"/>
                 </a:solidFill>
@@ -4112,11 +4144,11 @@
           <a:p>
             <a:pPr>
               <a:spcAft>
-                <a:spcPts val="500"/>
-              </a:spcAft>
-            </a:pPr>
-            <a:r>
-              <a:rPr sz="1700" b="0" i="0">
+                <a:spcPts val="400"/>
+              </a:spcAft>
+            </a:pPr>
+            <a:r>
+              <a:rPr sz="1600" b="0" i="0">
                 <a:solidFill>
                   <a:srgbClr val="8A97A3"/>
                 </a:solidFill>
@@ -4128,11 +4160,11 @@
           <a:p>
             <a:pPr>
               <a:spcAft>
-                <a:spcPts val="500"/>
-              </a:spcAft>
-            </a:pPr>
-            <a:r>
-              <a:rPr sz="1700" b="0" i="0">
+                <a:spcPts val="400"/>
+              </a:spcAft>
+            </a:pPr>
+            <a:r>
+              <a:rPr sz="1600" b="0" i="0">
                 <a:solidFill>
                   <a:srgbClr val="8A97A3"/>
                 </a:solidFill>
@@ -4144,11 +4176,11 @@
           <a:p>
             <a:pPr>
               <a:spcAft>
-                <a:spcPts val="500"/>
-              </a:spcAft>
-            </a:pPr>
-            <a:r>
-              <a:rPr sz="1700" b="0" i="0">
+                <a:spcPts val="400"/>
+              </a:spcAft>
+            </a:pPr>
+            <a:r>
+              <a:rPr sz="1600" b="0" i="0">
                 <a:solidFill>
                   <a:srgbClr val="8A97A3"/>
                 </a:solidFill>
@@ -4160,11 +4192,11 @@
           <a:p>
             <a:pPr>
               <a:spcAft>
-                <a:spcPts val="500"/>
-              </a:spcAft>
-            </a:pPr>
-            <a:r>
-              <a:rPr sz="1900" b="1" i="0">
+                <a:spcPts val="400"/>
+              </a:spcAft>
+            </a:pPr>
+            <a:r>
+              <a:rPr sz="1800" b="1" i="0">
                 <a:solidFill>
                   <a:srgbClr val="7FD8E8"/>
                 </a:solidFill>
@@ -4176,11 +4208,11 @@
           <a:p>
             <a:pPr>
               <a:spcAft>
-                <a:spcPts val="500"/>
-              </a:spcAft>
-            </a:pPr>
-            <a:r>
-              <a:rPr sz="1700" b="0" i="0">
+                <a:spcPts val="400"/>
+              </a:spcAft>
+            </a:pPr>
+            <a:r>
+              <a:rPr sz="1600" b="0" i="0">
                 <a:solidFill>
                   <a:srgbClr val="8A97A3"/>
                 </a:solidFill>
@@ -4225,7 +4257,7 @@
                 </a:solidFill>
                 <a:latin typeface="Arial"/>
               </a:rPr>
-              <a:t>Two of these are the shape, not the code: a credential that can be stolen, and an interface that can be reached.</a:t>
+              <a:t>Two of the three are the shell, not the code: a credential that could be stolen, and an interface that could be reached.</a:t>
             </a:r>
           </a:p>
         </p:txBody>
@@ -5262,6 +5294,45 @@
                 <a:latin typeface="Arial"/>
               </a:rPr>
               <a:t>—   The signer can run inside an attested secure enclave.</a:t>
+            </a:r>
+          </a:p>
+        </p:txBody>
+      </p:sp>
+      <p:sp>
+        <p:nvSpPr>
+          <p:cNvPr id="6" name="TextBox 5"/>
+          <p:cNvSpPr txBox="1"/>
+          <p:nvPr/>
+        </p:nvSpPr>
+        <p:spPr>
+          <a:xfrm>
+            <a:off x="822960" y="5989320"/>
+            <a:ext cx="10515600" cy="457200"/>
+          </a:xfrm>
+          <a:prstGeom prst="rect">
+            <a:avLst/>
+          </a:prstGeom>
+          <a:noFill/>
+        </p:spPr>
+        <p:txBody>
+          <a:bodyPr wrap="square" lIns="0" rIns="0" tIns="0" bIns="0">
+            <a:spAutoFit/>
+          </a:bodyPr>
+          <a:lstStyle/>
+          <a:p>
+            <a:pPr>
+              <a:spcAft>
+                <a:spcPts val="0"/>
+              </a:spcAft>
+            </a:pPr>
+            <a:r>
+              <a:rPr sz="1400" b="0" i="1">
+                <a:solidFill>
+                  <a:srgbClr val="8A97A3"/>
+                </a:solidFill>
+                <a:latin typeface="Arial"/>
+              </a:rPr>
+              <a:t>There is no soft centre, because the part worth stealing was never inside the shell.</a:t>
             </a:r>
           </a:p>
         </p:txBody>
